--- a/MANUAL.pptx
+++ b/MANUAL.pptx
@@ -166,7 +166,7 @@
   <pc:docChgLst>
     <pc:chgData name="sh ito" userId="b72e1b45a6eb2453" providerId="LiveId" clId="{4A52BE65-D49D-45EA-8A08-CAF35556917D}"/>
     <pc:docChg chg="undo custSel addSld delSld modSld sldOrd modSection">
-      <pc:chgData name="sh ito" userId="b72e1b45a6eb2453" providerId="LiveId" clId="{4A52BE65-D49D-45EA-8A08-CAF35556917D}" dt="2026-05-04T13:54:30.142" v="3573" actId="20577"/>
+      <pc:chgData name="sh ito" userId="b72e1b45a6eb2453" providerId="LiveId" clId="{4A52BE65-D49D-45EA-8A08-CAF35556917D}" dt="2026-05-05T08:36:31.927" v="3608" actId="207"/>
       <pc:docMkLst>
         <pc:docMk/>
       </pc:docMkLst>
@@ -815,7 +815,7 @@
         </pc:picChg>
       </pc:sldChg>
       <pc:sldChg chg="addSp delSp modSp add mod">
-        <pc:chgData name="sh ito" userId="b72e1b45a6eb2453" providerId="LiveId" clId="{4A52BE65-D49D-45EA-8A08-CAF35556917D}" dt="2026-05-04T10:35:06.119" v="1038" actId="20577"/>
+        <pc:chgData name="sh ito" userId="b72e1b45a6eb2453" providerId="LiveId" clId="{4A52BE65-D49D-45EA-8A08-CAF35556917D}" dt="2026-05-04T22:23:17.565" v="3586" actId="20577"/>
         <pc:sldMkLst>
           <pc:docMk/>
           <pc:sldMk cId="792282740" sldId="265"/>
@@ -1013,7 +1013,7 @@
           </ac:spMkLst>
         </pc:spChg>
         <pc:spChg chg="mod">
-          <ac:chgData name="sh ito" userId="b72e1b45a6eb2453" providerId="LiveId" clId="{4A52BE65-D49D-45EA-8A08-CAF35556917D}" dt="2026-05-04T10:35:06.119" v="1038" actId="20577"/>
+          <ac:chgData name="sh ito" userId="b72e1b45a6eb2453" providerId="LiveId" clId="{4A52BE65-D49D-45EA-8A08-CAF35556917D}" dt="2026-05-04T22:23:17.565" v="3586" actId="20577"/>
           <ac:spMkLst>
             <pc:docMk/>
             <pc:sldMk cId="792282740" sldId="265"/>
@@ -1851,7 +1851,7 @@
         </pc:picChg>
       </pc:sldChg>
       <pc:sldChg chg="addSp delSp modSp new mod">
-        <pc:chgData name="sh ito" userId="b72e1b45a6eb2453" providerId="LiveId" clId="{4A52BE65-D49D-45EA-8A08-CAF35556917D}" dt="2026-05-04T12:11:09.551" v="3549" actId="20577"/>
+        <pc:chgData name="sh ito" userId="b72e1b45a6eb2453" providerId="LiveId" clId="{4A52BE65-D49D-45EA-8A08-CAF35556917D}" dt="2026-05-05T08:36:31.927" v="3608" actId="207"/>
         <pc:sldMkLst>
           <pc:docMk/>
           <pc:sldMk cId="1379221054" sldId="268"/>
@@ -1913,7 +1913,7 @@
           </ac:grpSpMkLst>
         </pc:grpChg>
         <pc:graphicFrameChg chg="add mod modGraphic">
-          <ac:chgData name="sh ito" userId="b72e1b45a6eb2453" providerId="LiveId" clId="{4A52BE65-D49D-45EA-8A08-CAF35556917D}" dt="2026-05-04T12:11:09.551" v="3549" actId="20577"/>
+          <ac:chgData name="sh ito" userId="b72e1b45a6eb2453" providerId="LiveId" clId="{4A52BE65-D49D-45EA-8A08-CAF35556917D}" dt="2026-05-05T08:36:31.927" v="3608" actId="207"/>
           <ac:graphicFrameMkLst>
             <pc:docMk/>
             <pc:sldMk cId="1379221054" sldId="268"/>
@@ -2044,7 +2044,7 @@
           <a:p>
             <a:fld id="{7B208B7B-53C7-4285-8EF1-61B92BB12964}" type="datetimeFigureOut">
               <a:rPr kumimoji="1" lang="ja-JP" altLang="en-US" smtClean="0"/>
-              <a:t>2026/5/4</a:t>
+              <a:t>2026/5/5</a:t>
             </a:fld>
             <a:endParaRPr kumimoji="1" lang="ja-JP" altLang="en-US"/>
           </a:p>
@@ -2380,7 +2380,7 @@
           <a:p>
             <a:fld id="{179CDF34-E5FE-40A1-AEE7-E48538A5EDB7}" type="datetimeFigureOut">
               <a:rPr kumimoji="1" lang="ja-JP" altLang="en-US" smtClean="0"/>
-              <a:t>2026/5/4</a:t>
+              <a:t>2026/5/5</a:t>
             </a:fld>
             <a:endParaRPr kumimoji="1" lang="ja-JP" altLang="en-US"/>
           </a:p>
@@ -3229,7 +3229,7 @@
           <p:nvPr>
             <p:extLst>
               <p:ext uri="{D42A27DB-BD31-4B8C-83A1-F6EECF244321}">
-                <p14:modId xmlns:p14="http://schemas.microsoft.com/office/powerpoint/2010/main" val="3101390348"/>
+                <p14:modId xmlns:p14="http://schemas.microsoft.com/office/powerpoint/2010/main" val="1578486620"/>
               </p:ext>
             </p:extLst>
           </p:nvPr>
@@ -6109,7 +6109,7 @@
                         <a:defRPr/>
                       </a:pPr>
                       <a:r>
-                        <a:rPr lang="ja-JP" altLang="en-US" sz="1200" b="0" i="0" u="none" strike="noStrike">
+                        <a:rPr lang="en-US" altLang="ja-JP" sz="1200" b="0" i="0" u="none" strike="noStrike">
                           <a:solidFill>
                             <a:schemeClr val="bg1"/>
                           </a:solidFill>
@@ -6118,7 +6118,38 @@
                           <a:ea typeface="游ゴシック Medium" panose="020B0500000000000000" pitchFamily="50" charset="-128"/>
                           <a:cs typeface="Courier New" panose="02070309020205020404" pitchFamily="49" charset="0"/>
                         </a:rPr>
-                        <a:t>●</a:t>
+                        <a:t>Shutdown</a:t>
+                      </a:r>
+                    </a:p>
+                    <a:p>
+                      <a:pPr marL="0" marR="0" lvl="0" indent="0" algn="ctr" defTabSz="914400" rtl="0" eaLnBrk="1" fontAlgn="ctr" latinLnBrk="0" hangingPunct="1">
+                        <a:lnSpc>
+                          <a:spcPct val="100000"/>
+                        </a:lnSpc>
+                        <a:spcBef>
+                          <a:spcPts val="0"/>
+                        </a:spcBef>
+                        <a:spcAft>
+                          <a:spcPts val="0"/>
+                        </a:spcAft>
+                        <a:buClrTx/>
+                        <a:buSzTx/>
+                        <a:buFontTx/>
+                        <a:buNone/>
+                        <a:tabLst/>
+                        <a:defRPr/>
+                      </a:pPr>
+                      <a:r>
+                        <a:rPr lang="en-US" altLang="ja-JP" sz="1200" b="0" i="0" u="none" strike="noStrike">
+                          <a:solidFill>
+                            <a:schemeClr val="bg1"/>
+                          </a:solidFill>
+                          <a:effectLst/>
+                          <a:latin typeface="Consolas" panose="020B0609020204030204" pitchFamily="49" charset="0"/>
+                          <a:ea typeface="游ゴシック Medium" panose="020B0500000000000000" pitchFamily="50" charset="-128"/>
+                          <a:cs typeface="Courier New" panose="02070309020205020404" pitchFamily="49" charset="0"/>
+                        </a:rPr>
+                        <a:t>AHK</a:t>
                       </a:r>
                       <a:endParaRPr lang="ja-JP" altLang="en-US" sz="1200" b="0" i="0" u="none" strike="noStrike" dirty="0">
                         <a:solidFill>
@@ -6175,7 +6206,7 @@
                       <a:prstDash val="solid"/>
                     </a:lnBlToTr>
                     <a:solidFill>
-                      <a:schemeClr val="tx2"/>
+                      <a:schemeClr val="accent5"/>
                     </a:solidFill>
                   </a:tcPr>
                 </a:tc>
@@ -38745,7 +38776,7 @@
                 <a:ea typeface="Yu Gothic UI" panose="020B0500000000000000" pitchFamily="50" charset="-128"/>
                 <a:cs typeface="Cascadia Code" panose="020B0609020000020004" pitchFamily="49" charset="0"/>
               </a:rPr>
-              <a:t>記憶済</a:t>
+              <a:t>固定枠</a:t>
             </a:r>
             <a:endParaRPr lang="en-US" altLang="ja-JP" sz="2400">
               <a:solidFill>

--- a/MANUAL.pptx
+++ b/MANUAL.pptx
@@ -156,7 +156,7 @@
 <file path=ppt/revisionInfo.xml><?xml version="1.0" encoding="utf-8"?>
 <p1510:revInfo xmlns:a="http://schemas.openxmlformats.org/drawingml/2006/main" xmlns:r="http://schemas.openxmlformats.org/officeDocument/2006/relationships" xmlns:p1510="http://schemas.microsoft.com/office/powerpoint/2015/10/main">
   <p1510:revLst>
-    <p1510:client id="{2D9A7EEA-2DF5-4D6E-BEFB-7AD1075D1E27}" v="124" dt="2026-05-04T11:57:08.271"/>
+    <p1510:client id="{2D9A7EEA-2DF5-4D6E-BEFB-7AD1075D1E27}" v="137" dt="2026-05-05T22:18:39.580"/>
   </p1510:revLst>
 </p1510:revInfo>
 </file>
@@ -166,16 +166,63 @@
   <pc:docChgLst>
     <pc:chgData name="sh ito" userId="b72e1b45a6eb2453" providerId="LiveId" clId="{4A52BE65-D49D-45EA-8A08-CAF35556917D}"/>
     <pc:docChg chg="undo custSel addSld delSld modSld sldOrd modSection">
-      <pc:chgData name="sh ito" userId="b72e1b45a6eb2453" providerId="LiveId" clId="{4A52BE65-D49D-45EA-8A08-CAF35556917D}" dt="2026-05-05T08:36:31.927" v="3608" actId="207"/>
+      <pc:chgData name="sh ito" userId="b72e1b45a6eb2453" providerId="LiveId" clId="{4A52BE65-D49D-45EA-8A08-CAF35556917D}" dt="2026-05-05T22:46:09.471" v="3822" actId="478"/>
       <pc:docMkLst>
         <pc:docMk/>
       </pc:docMkLst>
-      <pc:sldChg chg="addSp modSp mod">
-        <pc:chgData name="sh ito" userId="b72e1b45a6eb2453" providerId="LiveId" clId="{4A52BE65-D49D-45EA-8A08-CAF35556917D}" dt="2026-05-04T11:35:21.207" v="3434" actId="1076"/>
+      <pc:sldChg chg="addSp delSp modSp mod">
+        <pc:chgData name="sh ito" userId="b72e1b45a6eb2453" providerId="LiveId" clId="{4A52BE65-D49D-45EA-8A08-CAF35556917D}" dt="2026-05-05T22:46:09.471" v="3822" actId="478"/>
+        <pc:sldMkLst>
+          <pc:docMk/>
+          <pc:sldMk cId="2866042516" sldId="256"/>
+        </pc:sldMkLst>
+        <pc:spChg chg="add del mod">
+          <ac:chgData name="sh ito" userId="b72e1b45a6eb2453" providerId="LiveId" clId="{4A52BE65-D49D-45EA-8A08-CAF35556917D}" dt="2026-05-05T22:25:03.805" v="3779" actId="478"/>
+          <ac:spMkLst>
+            <pc:docMk/>
+            <pc:sldMk cId="2866042516" sldId="256"/>
+            <ac:spMk id="63" creationId="{567ABE3B-1919-2B03-D49F-32A732179EDF}"/>
+          </ac:spMkLst>
+        </pc:spChg>
+        <pc:spChg chg="add del mod">
+          <ac:chgData name="sh ito" userId="b72e1b45a6eb2453" providerId="LiveId" clId="{4A52BE65-D49D-45EA-8A08-CAF35556917D}" dt="2026-05-05T22:30:52.152" v="3799" actId="478"/>
+          <ac:spMkLst>
+            <pc:docMk/>
+            <pc:sldMk cId="2866042516" sldId="256"/>
+            <ac:spMk id="64" creationId="{E7E9A76A-CFD0-F5BD-CE47-0DEA3C4C778D}"/>
+          </ac:spMkLst>
+        </pc:spChg>
+        <pc:spChg chg="mod">
+          <ac:chgData name="sh ito" userId="b72e1b45a6eb2453" providerId="LiveId" clId="{4A52BE65-D49D-45EA-8A08-CAF35556917D}" dt="2026-05-05T22:45:35.569" v="3805" actId="20577"/>
+          <ac:spMkLst>
+            <pc:docMk/>
+            <pc:sldMk cId="2866042516" sldId="256"/>
+            <ac:spMk id="66" creationId="{66DD324B-75CE-3C7C-19A2-8D3D8748CC82}"/>
+          </ac:spMkLst>
+        </pc:spChg>
+        <pc:spChg chg="add del mod">
+          <ac:chgData name="sh ito" userId="b72e1b45a6eb2453" providerId="LiveId" clId="{4A52BE65-D49D-45EA-8A08-CAF35556917D}" dt="2026-05-05T22:46:09.471" v="3822" actId="478"/>
+          <ac:spMkLst>
+            <pc:docMk/>
+            <pc:sldMk cId="2866042516" sldId="256"/>
+            <ac:spMk id="67" creationId="{B747F972-F740-DDDF-FA77-C0268AD85040}"/>
+          </ac:spMkLst>
+        </pc:spChg>
+      </pc:sldChg>
+      <pc:sldChg chg="addSp delSp modSp mod">
+        <pc:chgData name="sh ito" userId="b72e1b45a6eb2453" providerId="LiveId" clId="{4A52BE65-D49D-45EA-8A08-CAF35556917D}" dt="2026-05-05T22:24:27.581" v="3759" actId="478"/>
         <pc:sldMkLst>
           <pc:docMk/>
           <pc:sldMk cId="22913228" sldId="258"/>
         </pc:sldMkLst>
+        <pc:spChg chg="mod">
+          <ac:chgData name="sh ito" userId="b72e1b45a6eb2453" providerId="LiveId" clId="{4A52BE65-D49D-45EA-8A08-CAF35556917D}" dt="2026-05-05T22:06:23.139" v="3636" actId="122"/>
+          <ac:spMkLst>
+            <pc:docMk/>
+            <pc:sldMk cId="22913228" sldId="258"/>
+            <ac:spMk id="2" creationId="{1AC96BAA-F1B5-CE0D-B81E-CDBA5BAA604E}"/>
+          </ac:spMkLst>
+        </pc:spChg>
         <pc:spChg chg="mod">
           <ac:chgData name="sh ito" userId="b72e1b45a6eb2453" providerId="LiveId" clId="{4A52BE65-D49D-45EA-8A08-CAF35556917D}" dt="2026-05-04T11:34:17.082" v="3427" actId="1076"/>
           <ac:spMkLst>
@@ -192,12 +239,68 @@
             <ac:spMk id="4" creationId="{D5536702-B0AC-4018-E195-F63224C08EF8}"/>
           </ac:spMkLst>
         </pc:spChg>
+        <pc:spChg chg="add del mod">
+          <ac:chgData name="sh ito" userId="b72e1b45a6eb2453" providerId="LiveId" clId="{4A52BE65-D49D-45EA-8A08-CAF35556917D}" dt="2026-05-05T22:07:35.235" v="3648" actId="478"/>
+          <ac:spMkLst>
+            <pc:docMk/>
+            <pc:sldMk cId="22913228" sldId="258"/>
+            <ac:spMk id="8" creationId="{D09A14E7-4C74-1059-6D5C-54B2C62919F9}"/>
+          </ac:spMkLst>
+        </pc:spChg>
+        <pc:spChg chg="add del mod">
+          <ac:chgData name="sh ito" userId="b72e1b45a6eb2453" providerId="LiveId" clId="{4A52BE65-D49D-45EA-8A08-CAF35556917D}" dt="2026-05-05T22:17:22.082" v="3689" actId="478"/>
+          <ac:spMkLst>
+            <pc:docMk/>
+            <pc:sldMk cId="22913228" sldId="258"/>
+            <ac:spMk id="9" creationId="{E9D6BE4B-098B-DC0F-A54C-0EA43A7F3468}"/>
+          </ac:spMkLst>
+        </pc:spChg>
+        <pc:spChg chg="add del mod">
+          <ac:chgData name="sh ito" userId="b72e1b45a6eb2453" providerId="LiveId" clId="{4A52BE65-D49D-45EA-8A08-CAF35556917D}" dt="2026-05-05T22:17:25.783" v="3692" actId="478"/>
+          <ac:spMkLst>
+            <pc:docMk/>
+            <pc:sldMk cId="22913228" sldId="258"/>
+            <ac:spMk id="10" creationId="{BA0EBEF6-1065-B589-7921-1BAFD24A37FF}"/>
+          </ac:spMkLst>
+        </pc:spChg>
+        <pc:spChg chg="add del mod topLvl">
+          <ac:chgData name="sh ito" userId="b72e1b45a6eb2453" providerId="LiveId" clId="{4A52BE65-D49D-45EA-8A08-CAF35556917D}" dt="2026-05-05T22:24:27.581" v="3759" actId="478"/>
+          <ac:spMkLst>
+            <pc:docMk/>
+            <pc:sldMk cId="22913228" sldId="258"/>
+            <ac:spMk id="11" creationId="{612A9DF2-82A0-2369-0CF9-87E30C6CE9EC}"/>
+          </ac:spMkLst>
+        </pc:spChg>
+        <pc:spChg chg="add mod topLvl">
+          <ac:chgData name="sh ito" userId="b72e1b45a6eb2453" providerId="LiveId" clId="{4A52BE65-D49D-45EA-8A08-CAF35556917D}" dt="2026-05-05T22:18:39.580" v="3713" actId="571"/>
+          <ac:spMkLst>
+            <pc:docMk/>
+            <pc:sldMk cId="22913228" sldId="258"/>
+            <ac:spMk id="12" creationId="{A95410AE-AFAC-414C-8977-681FB409F5BB}"/>
+          </ac:spMkLst>
+        </pc:spChg>
         <pc:grpChg chg="add mod">
           <ac:chgData name="sh ito" userId="b72e1b45a6eb2453" providerId="LiveId" clId="{4A52BE65-D49D-45EA-8A08-CAF35556917D}" dt="2026-05-04T11:35:21.207" v="3434" actId="1076"/>
           <ac:grpSpMkLst>
             <pc:docMk/>
             <pc:sldMk cId="22913228" sldId="258"/>
             <ac:grpSpMk id="7" creationId="{DE075037-F602-324B-5C57-B825BAAEADC4}"/>
+          </ac:grpSpMkLst>
+        </pc:grpChg>
+        <pc:grpChg chg="add mod">
+          <ac:chgData name="sh ito" userId="b72e1b45a6eb2453" providerId="LiveId" clId="{4A52BE65-D49D-45EA-8A08-CAF35556917D}" dt="2026-05-05T22:18:34.754" v="3707" actId="164"/>
+          <ac:grpSpMkLst>
+            <pc:docMk/>
+            <pc:sldMk cId="22913228" sldId="258"/>
+            <ac:grpSpMk id="13" creationId="{46255FB7-D805-ED7E-58B9-283990A4DED9}"/>
+          </ac:grpSpMkLst>
+        </pc:grpChg>
+        <pc:grpChg chg="add del mod">
+          <ac:chgData name="sh ito" userId="b72e1b45a6eb2453" providerId="LiveId" clId="{4A52BE65-D49D-45EA-8A08-CAF35556917D}" dt="2026-05-05T22:18:38.455" v="3711" actId="164"/>
+          <ac:grpSpMkLst>
+            <pc:docMk/>
+            <pc:sldMk cId="22913228" sldId="258"/>
+            <ac:grpSpMk id="14" creationId="{62F52781-E98C-42FD-DFA4-090BD83BE5D1}"/>
           </ac:grpSpMkLst>
         </pc:grpChg>
         <pc:picChg chg="mod">
@@ -241,7 +344,7 @@
         </pc:spChg>
       </pc:sldChg>
       <pc:sldChg chg="addSp modSp mod">
-        <pc:chgData name="sh ito" userId="b72e1b45a6eb2453" providerId="LiveId" clId="{4A52BE65-D49D-45EA-8A08-CAF35556917D}" dt="2026-05-04T10:25:25.857" v="906" actId="166"/>
+        <pc:chgData name="sh ito" userId="b72e1b45a6eb2453" providerId="LiveId" clId="{4A52BE65-D49D-45EA-8A08-CAF35556917D}" dt="2026-05-05T08:55:34.814" v="3613" actId="1076"/>
         <pc:sldMkLst>
           <pc:docMk/>
           <pc:sldMk cId="2014633800" sldId="263"/>
@@ -342,6 +445,14 @@
             <ac:spMk id="89" creationId="{9B708D5D-2419-67BF-5107-9E5272732741}"/>
           </ac:spMkLst>
         </pc:spChg>
+        <pc:picChg chg="mod">
+          <ac:chgData name="sh ito" userId="b72e1b45a6eb2453" providerId="LiveId" clId="{4A52BE65-D49D-45EA-8A08-CAF35556917D}" dt="2026-05-05T08:55:34.814" v="3613" actId="1076"/>
+          <ac:picMkLst>
+            <pc:docMk/>
+            <pc:sldMk cId="2014633800" sldId="263"/>
+            <ac:picMk id="74" creationId="{9A11D7A7-A59A-EE3C-DF5E-087690AE4477}"/>
+          </ac:picMkLst>
+        </pc:picChg>
         <pc:picChg chg="ord">
           <ac:chgData name="sh ito" userId="b72e1b45a6eb2453" providerId="LiveId" clId="{4A52BE65-D49D-45EA-8A08-CAF35556917D}" dt="2026-05-04T10:25:25.857" v="906" actId="166"/>
           <ac:picMkLst>
@@ -815,7 +926,7 @@
         </pc:picChg>
       </pc:sldChg>
       <pc:sldChg chg="addSp delSp modSp add mod">
-        <pc:chgData name="sh ito" userId="b72e1b45a6eb2453" providerId="LiveId" clId="{4A52BE65-D49D-45EA-8A08-CAF35556917D}" dt="2026-05-04T22:23:17.565" v="3586" actId="20577"/>
+        <pc:chgData name="sh ito" userId="b72e1b45a6eb2453" providerId="LiveId" clId="{4A52BE65-D49D-45EA-8A08-CAF35556917D}" dt="2026-05-05T08:55:22.337" v="3610" actId="20577"/>
         <pc:sldMkLst>
           <pc:docMk/>
           <pc:sldMk cId="792282740" sldId="265"/>
@@ -826,6 +937,14 @@
             <pc:docMk/>
             <pc:sldMk cId="792282740" sldId="265"/>
             <ac:spMk id="2" creationId="{FA0B64A5-569A-030D-55F0-1C6700D9D117}"/>
+          </ac:spMkLst>
+        </pc:spChg>
+        <pc:spChg chg="add mod">
+          <ac:chgData name="sh ito" userId="b72e1b45a6eb2453" providerId="LiveId" clId="{4A52BE65-D49D-45EA-8A08-CAF35556917D}" dt="2026-05-05T08:55:22.337" v="3610" actId="20577"/>
+          <ac:spMkLst>
+            <pc:docMk/>
+            <pc:sldMk cId="792282740" sldId="265"/>
+            <ac:spMk id="3" creationId="{C74B8370-F333-536C-ACBD-9F958FEED7EF}"/>
           </ac:spMkLst>
         </pc:spChg>
         <pc:spChg chg="del">
@@ -2044,7 +2163,7 @@
           <a:p>
             <a:fld id="{7B208B7B-53C7-4285-8EF1-61B92BB12964}" type="datetimeFigureOut">
               <a:rPr kumimoji="1" lang="ja-JP" altLang="en-US" smtClean="0"/>
-              <a:t>2026/5/5</a:t>
+              <a:t>2026/5/6</a:t>
             </a:fld>
             <a:endParaRPr kumimoji="1" lang="ja-JP" altLang="en-US"/>
           </a:p>
@@ -2380,7 +2499,7 @@
           <a:p>
             <a:fld id="{179CDF34-E5FE-40A1-AEE7-E48538A5EDB7}" type="datetimeFigureOut">
               <a:rPr kumimoji="1" lang="ja-JP" altLang="en-US" smtClean="0"/>
-              <a:t>2026/5/5</a:t>
+              <a:t>2026/5/6</a:t>
             </a:fld>
             <a:endParaRPr kumimoji="1" lang="ja-JP" altLang="en-US"/>
           </a:p>
@@ -2811,7 +2930,7 @@
           </a:prstGeom>
         </p:spPr>
         <p:txBody>
-          <a:bodyPr>
+          <a:bodyPr anchor="ctr">
             <a:noAutofit/>
           </a:bodyPr>
           <a:lstStyle>
@@ -20397,7 +20516,7 @@
               </a:rPr>
               <a:t>だけベースのキーを変更</a:t>
             </a:r>
-            <a:endParaRPr kumimoji="1" lang="en-US" altLang="ja-JP" sz="2400">
+            <a:endParaRPr lang="en-US" altLang="ja-JP" sz="2400">
               <a:solidFill>
                 <a:schemeClr val="bg1"/>
               </a:solidFill>
@@ -34376,8 +34495,8 @@
         </p:blipFill>
         <p:spPr bwMode="auto">
           <a:xfrm>
-            <a:off x="10284253" y="4467496"/>
-            <a:ext cx="489766" cy="384598"/>
+            <a:off x="10224677" y="4449436"/>
+            <a:ext cx="608917" cy="478164"/>
           </a:xfrm>
           <a:prstGeom prst="rect">
             <a:avLst/>
@@ -42385,6 +42504,62 @@
           </a:extLst>
         </p:spPr>
       </p:pic>
+      <p:sp>
+        <p:nvSpPr>
+          <p:cNvPr id="3" name="角丸四角形 46">
+            <a:extLst>
+              <a:ext uri="{FF2B5EF4-FFF2-40B4-BE49-F238E27FC236}">
+                <a16:creationId xmlns:a16="http://schemas.microsoft.com/office/drawing/2014/main" id="{C74B8370-F333-536C-ACBD-9F958FEED7EF}"/>
+              </a:ext>
+            </a:extLst>
+          </p:cNvPr>
+          <p:cNvSpPr/>
+          <p:nvPr/>
+        </p:nvSpPr>
+        <p:spPr>
+          <a:xfrm>
+            <a:off x="9802604" y="4387776"/>
+            <a:ext cx="1415064" cy="597162"/>
+          </a:xfrm>
+          <a:prstGeom prst="roundRect">
+            <a:avLst/>
+          </a:prstGeom>
+          <a:noFill/>
+          <a:ln w="12700">
+            <a:solidFill>
+              <a:schemeClr val="bg1"/>
+            </a:solidFill>
+          </a:ln>
+        </p:spPr>
+        <p:style>
+          <a:lnRef idx="2">
+            <a:schemeClr val="accent6"/>
+          </a:lnRef>
+          <a:fillRef idx="1">
+            <a:schemeClr val="lt1"/>
+          </a:fillRef>
+          <a:effectRef idx="0">
+            <a:schemeClr val="accent6"/>
+          </a:effectRef>
+          <a:fontRef idx="minor">
+            <a:schemeClr val="dk1"/>
+          </a:fontRef>
+        </p:style>
+        <p:txBody>
+          <a:bodyPr wrap="none" rtlCol="0" anchor="ctr"/>
+          <a:lstStyle/>
+          <a:p>
+            <a:pPr algn="ctr"/>
+            <a:endParaRPr lang="ja-JP" altLang="en-US" sz="1100">
+              <a:solidFill>
+                <a:schemeClr val="bg1"/>
+              </a:solidFill>
+              <a:latin typeface="Consolas" panose="020B0609020204030204" pitchFamily="49" charset="0"/>
+              <a:cs typeface="Cascadia Code" panose="020B0609020000020004" pitchFamily="49" charset="0"/>
+            </a:endParaRPr>
+          </a:p>
+        </p:txBody>
+      </p:sp>
     </p:spTree>
     <p:extLst>
       <p:ext uri="{BB962C8B-B14F-4D97-AF65-F5344CB8AC3E}">

--- a/MANUAL.pptx
+++ b/MANUAL.pptx
@@ -156,7 +156,7 @@
 <file path=ppt/revisionInfo.xml><?xml version="1.0" encoding="utf-8"?>
 <p1510:revInfo xmlns:a="http://schemas.openxmlformats.org/drawingml/2006/main" xmlns:r="http://schemas.openxmlformats.org/officeDocument/2006/relationships" xmlns:p1510="http://schemas.microsoft.com/office/powerpoint/2015/10/main">
   <p1510:revLst>
-    <p1510:client id="{2D9A7EEA-2DF5-4D6E-BEFB-7AD1075D1E27}" v="137" dt="2026-05-05T22:18:39.580"/>
+    <p1510:client id="{2D9A7EEA-2DF5-4D6E-BEFB-7AD1075D1E27}" v="145" dt="2026-05-17T04:49:24.046"/>
   </p1510:revLst>
 </p1510:revInfo>
 </file>
@@ -165,8 +165,8 @@
 <pc:chgInfo xmlns:a="http://schemas.openxmlformats.org/drawingml/2006/main" xmlns:r="http://schemas.openxmlformats.org/officeDocument/2006/relationships" xmlns:ac="http://schemas.microsoft.com/office/drawing/2013/main/command" xmlns:pc="http://schemas.microsoft.com/office/powerpoint/2013/main/command">
   <pc:docChgLst>
     <pc:chgData name="sh ito" userId="b72e1b45a6eb2453" providerId="LiveId" clId="{4A52BE65-D49D-45EA-8A08-CAF35556917D}"/>
-    <pc:docChg chg="undo custSel addSld delSld modSld sldOrd modSection">
-      <pc:chgData name="sh ito" userId="b72e1b45a6eb2453" providerId="LiveId" clId="{4A52BE65-D49D-45EA-8A08-CAF35556917D}" dt="2026-05-05T22:46:09.471" v="3822" actId="478"/>
+    <pc:docChg chg="undo redo custSel addSld delSld modSld sldOrd modSection">
+      <pc:chgData name="sh ito" userId="b72e1b45a6eb2453" providerId="LiveId" clId="{4A52BE65-D49D-45EA-8A08-CAF35556917D}" dt="2026-05-17T04:50:53.163" v="3908" actId="403"/>
       <pc:docMkLst>
         <pc:docMk/>
       </pc:docMkLst>
@@ -176,36 +176,12 @@
           <pc:docMk/>
           <pc:sldMk cId="2866042516" sldId="256"/>
         </pc:sldMkLst>
-        <pc:spChg chg="add del mod">
-          <ac:chgData name="sh ito" userId="b72e1b45a6eb2453" providerId="LiveId" clId="{4A52BE65-D49D-45EA-8A08-CAF35556917D}" dt="2026-05-05T22:25:03.805" v="3779" actId="478"/>
-          <ac:spMkLst>
-            <pc:docMk/>
-            <pc:sldMk cId="2866042516" sldId="256"/>
-            <ac:spMk id="63" creationId="{567ABE3B-1919-2B03-D49F-32A732179EDF}"/>
-          </ac:spMkLst>
-        </pc:spChg>
-        <pc:spChg chg="add del mod">
-          <ac:chgData name="sh ito" userId="b72e1b45a6eb2453" providerId="LiveId" clId="{4A52BE65-D49D-45EA-8A08-CAF35556917D}" dt="2026-05-05T22:30:52.152" v="3799" actId="478"/>
-          <ac:spMkLst>
-            <pc:docMk/>
-            <pc:sldMk cId="2866042516" sldId="256"/>
-            <ac:spMk id="64" creationId="{E7E9A76A-CFD0-F5BD-CE47-0DEA3C4C778D}"/>
-          </ac:spMkLst>
-        </pc:spChg>
         <pc:spChg chg="mod">
           <ac:chgData name="sh ito" userId="b72e1b45a6eb2453" providerId="LiveId" clId="{4A52BE65-D49D-45EA-8A08-CAF35556917D}" dt="2026-05-05T22:45:35.569" v="3805" actId="20577"/>
           <ac:spMkLst>
             <pc:docMk/>
             <pc:sldMk cId="2866042516" sldId="256"/>
             <ac:spMk id="66" creationId="{66DD324B-75CE-3C7C-19A2-8D3D8748CC82}"/>
-          </ac:spMkLst>
-        </pc:spChg>
-        <pc:spChg chg="add del mod">
-          <ac:chgData name="sh ito" userId="b72e1b45a6eb2453" providerId="LiveId" clId="{4A52BE65-D49D-45EA-8A08-CAF35556917D}" dt="2026-05-05T22:46:09.471" v="3822" actId="478"/>
-          <ac:spMkLst>
-            <pc:docMk/>
-            <pc:sldMk cId="2866042516" sldId="256"/>
-            <ac:spMk id="67" creationId="{B747F972-F740-DDDF-FA77-C0268AD85040}"/>
           </ac:spMkLst>
         </pc:spChg>
       </pc:sldChg>
@@ -239,68 +215,12 @@
             <ac:spMk id="4" creationId="{D5536702-B0AC-4018-E195-F63224C08EF8}"/>
           </ac:spMkLst>
         </pc:spChg>
-        <pc:spChg chg="add del mod">
-          <ac:chgData name="sh ito" userId="b72e1b45a6eb2453" providerId="LiveId" clId="{4A52BE65-D49D-45EA-8A08-CAF35556917D}" dt="2026-05-05T22:07:35.235" v="3648" actId="478"/>
-          <ac:spMkLst>
-            <pc:docMk/>
-            <pc:sldMk cId="22913228" sldId="258"/>
-            <ac:spMk id="8" creationId="{D09A14E7-4C74-1059-6D5C-54B2C62919F9}"/>
-          </ac:spMkLst>
-        </pc:spChg>
-        <pc:spChg chg="add del mod">
-          <ac:chgData name="sh ito" userId="b72e1b45a6eb2453" providerId="LiveId" clId="{4A52BE65-D49D-45EA-8A08-CAF35556917D}" dt="2026-05-05T22:17:22.082" v="3689" actId="478"/>
-          <ac:spMkLst>
-            <pc:docMk/>
-            <pc:sldMk cId="22913228" sldId="258"/>
-            <ac:spMk id="9" creationId="{E9D6BE4B-098B-DC0F-A54C-0EA43A7F3468}"/>
-          </ac:spMkLst>
-        </pc:spChg>
-        <pc:spChg chg="add del mod">
-          <ac:chgData name="sh ito" userId="b72e1b45a6eb2453" providerId="LiveId" clId="{4A52BE65-D49D-45EA-8A08-CAF35556917D}" dt="2026-05-05T22:17:25.783" v="3692" actId="478"/>
-          <ac:spMkLst>
-            <pc:docMk/>
-            <pc:sldMk cId="22913228" sldId="258"/>
-            <ac:spMk id="10" creationId="{BA0EBEF6-1065-B589-7921-1BAFD24A37FF}"/>
-          </ac:spMkLst>
-        </pc:spChg>
-        <pc:spChg chg="add del mod topLvl">
-          <ac:chgData name="sh ito" userId="b72e1b45a6eb2453" providerId="LiveId" clId="{4A52BE65-D49D-45EA-8A08-CAF35556917D}" dt="2026-05-05T22:24:27.581" v="3759" actId="478"/>
-          <ac:spMkLst>
-            <pc:docMk/>
-            <pc:sldMk cId="22913228" sldId="258"/>
-            <ac:spMk id="11" creationId="{612A9DF2-82A0-2369-0CF9-87E30C6CE9EC}"/>
-          </ac:spMkLst>
-        </pc:spChg>
-        <pc:spChg chg="add mod topLvl">
-          <ac:chgData name="sh ito" userId="b72e1b45a6eb2453" providerId="LiveId" clId="{4A52BE65-D49D-45EA-8A08-CAF35556917D}" dt="2026-05-05T22:18:39.580" v="3713" actId="571"/>
-          <ac:spMkLst>
-            <pc:docMk/>
-            <pc:sldMk cId="22913228" sldId="258"/>
-            <ac:spMk id="12" creationId="{A95410AE-AFAC-414C-8977-681FB409F5BB}"/>
-          </ac:spMkLst>
-        </pc:spChg>
         <pc:grpChg chg="add mod">
           <ac:chgData name="sh ito" userId="b72e1b45a6eb2453" providerId="LiveId" clId="{4A52BE65-D49D-45EA-8A08-CAF35556917D}" dt="2026-05-04T11:35:21.207" v="3434" actId="1076"/>
           <ac:grpSpMkLst>
             <pc:docMk/>
             <pc:sldMk cId="22913228" sldId="258"/>
             <ac:grpSpMk id="7" creationId="{DE075037-F602-324B-5C57-B825BAAEADC4}"/>
-          </ac:grpSpMkLst>
-        </pc:grpChg>
-        <pc:grpChg chg="add mod">
-          <ac:chgData name="sh ito" userId="b72e1b45a6eb2453" providerId="LiveId" clId="{4A52BE65-D49D-45EA-8A08-CAF35556917D}" dt="2026-05-05T22:18:34.754" v="3707" actId="164"/>
-          <ac:grpSpMkLst>
-            <pc:docMk/>
-            <pc:sldMk cId="22913228" sldId="258"/>
-            <ac:grpSpMk id="13" creationId="{46255FB7-D805-ED7E-58B9-283990A4DED9}"/>
-          </ac:grpSpMkLst>
-        </pc:grpChg>
-        <pc:grpChg chg="add del mod">
-          <ac:chgData name="sh ito" userId="b72e1b45a6eb2453" providerId="LiveId" clId="{4A52BE65-D49D-45EA-8A08-CAF35556917D}" dt="2026-05-05T22:18:38.455" v="3711" actId="164"/>
-          <ac:grpSpMkLst>
-            <pc:docMk/>
-            <pc:sldMk cId="22913228" sldId="258"/>
-            <ac:grpSpMk id="14" creationId="{62F52781-E98C-42FD-DFA4-090BD83BE5D1}"/>
           </ac:grpSpMkLst>
         </pc:grpChg>
         <pc:picChg chg="mod">
@@ -320,31 +240,46 @@
           </ac:picMkLst>
         </pc:picChg>
       </pc:sldChg>
+      <pc:sldChg chg="modSp mod">
+        <pc:chgData name="sh ito" userId="b72e1b45a6eb2453" providerId="LiveId" clId="{4A52BE65-D49D-45EA-8A08-CAF35556917D}" dt="2026-05-17T04:46:41.838" v="3848" actId="20577"/>
+        <pc:sldMkLst>
+          <pc:docMk/>
+          <pc:sldMk cId="2663064211" sldId="259"/>
+        </pc:sldMkLst>
+        <pc:spChg chg="mod">
+          <ac:chgData name="sh ito" userId="b72e1b45a6eb2453" providerId="LiveId" clId="{4A52BE65-D49D-45EA-8A08-CAF35556917D}" dt="2026-05-17T04:46:41.838" v="3848" actId="20577"/>
+          <ac:spMkLst>
+            <pc:docMk/>
+            <pc:sldMk cId="2663064211" sldId="259"/>
+            <ac:spMk id="18" creationId="{520FB12C-04EA-B317-BD5B-27AB3F5D0B71}"/>
+          </ac:spMkLst>
+        </pc:spChg>
+        <pc:spChg chg="mod">
+          <ac:chgData name="sh ito" userId="b72e1b45a6eb2453" providerId="LiveId" clId="{4A52BE65-D49D-45EA-8A08-CAF35556917D}" dt="2026-05-17T04:46:38.126" v="3844" actId="20577"/>
+          <ac:spMkLst>
+            <pc:docMk/>
+            <pc:sldMk cId="2663064211" sldId="259"/>
+            <ac:spMk id="51" creationId="{4529034F-25C4-A451-A8A9-855A21FDD321}"/>
+          </ac:spMkLst>
+        </pc:spChg>
+        <pc:spChg chg="mod">
+          <ac:chgData name="sh ito" userId="b72e1b45a6eb2453" providerId="LiveId" clId="{4A52BE65-D49D-45EA-8A08-CAF35556917D}" dt="2026-05-17T04:46:33.278" v="3840" actId="20577"/>
+          <ac:spMkLst>
+            <pc:docMk/>
+            <pc:sldMk cId="2663064211" sldId="259"/>
+            <ac:spMk id="66" creationId="{6FAB55CF-D9BF-BAC8-8634-F8EE42EE1EEE}"/>
+          </ac:spMkLst>
+        </pc:spChg>
+      </pc:sldChg>
       <pc:sldChg chg="addSp modSp">
         <pc:chgData name="sh ito" userId="b72e1b45a6eb2453" providerId="LiveId" clId="{4A52BE65-D49D-45EA-8A08-CAF35556917D}" dt="2026-05-04T10:19:12.612" v="449"/>
         <pc:sldMkLst>
           <pc:docMk/>
           <pc:sldMk cId="120740374" sldId="260"/>
         </pc:sldMkLst>
-        <pc:spChg chg="add mod">
-          <ac:chgData name="sh ito" userId="b72e1b45a6eb2453" providerId="LiveId" clId="{4A52BE65-D49D-45EA-8A08-CAF35556917D}" dt="2026-05-04T10:19:12.612" v="449"/>
-          <ac:spMkLst>
-            <pc:docMk/>
-            <pc:sldMk cId="120740374" sldId="260"/>
-            <ac:spMk id="62" creationId="{F17A6C14-0981-4C56-3041-64D9A4190A44}"/>
-          </ac:spMkLst>
-        </pc:spChg>
-        <pc:spChg chg="add mod">
-          <ac:chgData name="sh ito" userId="b72e1b45a6eb2453" providerId="LiveId" clId="{4A52BE65-D49D-45EA-8A08-CAF35556917D}" dt="2026-05-04T10:19:12.612" v="449"/>
-          <ac:spMkLst>
-            <pc:docMk/>
-            <pc:sldMk cId="120740374" sldId="260"/>
-            <ac:spMk id="63" creationId="{C71031E1-3EFE-E524-F5A1-53F82DBF6134}"/>
-          </ac:spMkLst>
-        </pc:spChg>
       </pc:sldChg>
-      <pc:sldChg chg="addSp modSp mod">
-        <pc:chgData name="sh ito" userId="b72e1b45a6eb2453" providerId="LiveId" clId="{4A52BE65-D49D-45EA-8A08-CAF35556917D}" dt="2026-05-05T08:55:34.814" v="3613" actId="1076"/>
+      <pc:sldChg chg="addSp delSp modSp mod">
+        <pc:chgData name="sh ito" userId="b72e1b45a6eb2453" providerId="LiveId" clId="{4A52BE65-D49D-45EA-8A08-CAF35556917D}" dt="2026-05-16T04:22:35.803" v="3826" actId="478"/>
         <pc:sldMkLst>
           <pc:docMk/>
           <pc:sldMk cId="2014633800" sldId="263"/>
@@ -395,6 +330,14 @@
             <pc:docMk/>
             <pc:sldMk cId="2014633800" sldId="263"/>
             <ac:spMk id="60" creationId="{A359D116-6657-B448-9302-E955655C9FFD}"/>
+          </ac:spMkLst>
+        </pc:spChg>
+        <pc:spChg chg="mod">
+          <ac:chgData name="sh ito" userId="b72e1b45a6eb2453" providerId="LiveId" clId="{4A52BE65-D49D-45EA-8A08-CAF35556917D}" dt="2026-05-16T04:22:33.626" v="3825" actId="207"/>
+          <ac:spMkLst>
+            <pc:docMk/>
+            <pc:sldMk cId="2014633800" sldId="263"/>
+            <ac:spMk id="68" creationId="{735194A1-65AB-9706-986C-E88645F0676F}"/>
           </ac:spMkLst>
         </pc:spChg>
         <pc:spChg chg="mod">
@@ -462,6 +405,22 @@
           </ac:picMkLst>
         </pc:picChg>
         <pc:picChg chg="mod">
+          <ac:chgData name="sh ito" userId="b72e1b45a6eb2453" providerId="LiveId" clId="{4A52BE65-D49D-45EA-8A08-CAF35556917D}" dt="2026-05-16T04:22:25.012" v="3824" actId="1076"/>
+          <ac:picMkLst>
+            <pc:docMk/>
+            <pc:sldMk cId="2014633800" sldId="263"/>
+            <ac:picMk id="83" creationId="{3ACA6D78-7878-328E-5A62-1CD9640FA788}"/>
+          </ac:picMkLst>
+        </pc:picChg>
+        <pc:picChg chg="del mod">
+          <ac:chgData name="sh ito" userId="b72e1b45a6eb2453" providerId="LiveId" clId="{4A52BE65-D49D-45EA-8A08-CAF35556917D}" dt="2026-05-16T04:22:35.803" v="3826" actId="478"/>
+          <ac:picMkLst>
+            <pc:docMk/>
+            <pc:sldMk cId="2014633800" sldId="263"/>
+            <ac:picMk id="124" creationId="{ED3959FF-00DB-F9CF-C5A9-76122FDDBABC}"/>
+          </ac:picMkLst>
+        </pc:picChg>
+        <pc:picChg chg="mod">
           <ac:chgData name="sh ito" userId="b72e1b45a6eb2453" providerId="LiveId" clId="{4A52BE65-D49D-45EA-8A08-CAF35556917D}" dt="2026-05-04T10:25:21.830" v="905" actId="166"/>
           <ac:picMkLst>
             <pc:docMk/>
@@ -476,22 +435,6 @@
           <pc:docMk/>
           <pc:sldMk cId="1216089840" sldId="264"/>
         </pc:sldMkLst>
-        <pc:spChg chg="del">
-          <ac:chgData name="sh ito" userId="b72e1b45a6eb2453" providerId="LiveId" clId="{4A52BE65-D49D-45EA-8A08-CAF35556917D}" dt="2026-05-04T10:12:55.299" v="155" actId="478"/>
-          <ac:spMkLst>
-            <pc:docMk/>
-            <pc:sldMk cId="1216089840" sldId="264"/>
-            <ac:spMk id="2" creationId="{FF84ABEE-F809-2BB3-512B-978482EB3084}"/>
-          </ac:spMkLst>
-        </pc:spChg>
-        <pc:spChg chg="del">
-          <ac:chgData name="sh ito" userId="b72e1b45a6eb2453" providerId="LiveId" clId="{4A52BE65-D49D-45EA-8A08-CAF35556917D}" dt="2026-05-04T10:12:54.612" v="154" actId="478"/>
-          <ac:spMkLst>
-            <pc:docMk/>
-            <pc:sldMk cId="1216089840" sldId="264"/>
-            <ac:spMk id="5" creationId="{BE275780-F103-70CC-23BF-42EBA62F3843}"/>
-          </ac:spMkLst>
-        </pc:spChg>
         <pc:spChg chg="mod">
           <ac:chgData name="sh ito" userId="b72e1b45a6eb2453" providerId="LiveId" clId="{4A52BE65-D49D-45EA-8A08-CAF35556917D}" dt="2026-05-04T10:13:17.579" v="187" actId="207"/>
           <ac:spMkLst>
@@ -602,14 +545,6 @@
             <pc:docMk/>
             <pc:sldMk cId="1216089840" sldId="264"/>
             <ac:spMk id="71" creationId="{893BCDD6-3B38-951A-EE9A-E9DC447ECC25}"/>
-          </ac:spMkLst>
-        </pc:spChg>
-        <pc:spChg chg="del mod">
-          <ac:chgData name="sh ito" userId="b72e1b45a6eb2453" providerId="LiveId" clId="{4A52BE65-D49D-45EA-8A08-CAF35556917D}" dt="2026-05-04T10:17:13.960" v="400" actId="478"/>
-          <ac:spMkLst>
-            <pc:docMk/>
-            <pc:sldMk cId="1216089840" sldId="264"/>
-            <ac:spMk id="73" creationId="{1978768C-B0F7-3B3B-141E-6B071D3EFB13}"/>
           </ac:spMkLst>
         </pc:spChg>
         <pc:spChg chg="mod">
@@ -796,134 +731,6 @@
             <ac:spMk id="114" creationId="{5B666DA4-F613-2F7E-3C3B-D9FBE5338F84}"/>
           </ac:spMkLst>
         </pc:spChg>
-        <pc:picChg chg="del">
-          <ac:chgData name="sh ito" userId="b72e1b45a6eb2453" providerId="LiveId" clId="{4A52BE65-D49D-45EA-8A08-CAF35556917D}" dt="2026-05-04T10:17:07.036" v="398" actId="478"/>
-          <ac:picMkLst>
-            <pc:docMk/>
-            <pc:sldMk cId="1216089840" sldId="264"/>
-            <ac:picMk id="74" creationId="{386024A7-8CAF-1B3C-7C9D-A1F16A4524A6}"/>
-          </ac:picMkLst>
-        </pc:picChg>
-        <pc:picChg chg="del">
-          <ac:chgData name="sh ito" userId="b72e1b45a6eb2453" providerId="LiveId" clId="{4A52BE65-D49D-45EA-8A08-CAF35556917D}" dt="2026-05-04T10:12:05.140" v="63" actId="478"/>
-          <ac:picMkLst>
-            <pc:docMk/>
-            <pc:sldMk cId="1216089840" sldId="264"/>
-            <ac:picMk id="80" creationId="{9C3117E3-4127-3408-1DC0-269FD8F2CF83}"/>
-          </ac:picMkLst>
-        </pc:picChg>
-        <pc:picChg chg="del">
-          <ac:chgData name="sh ito" userId="b72e1b45a6eb2453" providerId="LiveId" clId="{4A52BE65-D49D-45EA-8A08-CAF35556917D}" dt="2026-05-04T10:12:05.140" v="63" actId="478"/>
-          <ac:picMkLst>
-            <pc:docMk/>
-            <pc:sldMk cId="1216089840" sldId="264"/>
-            <ac:picMk id="81" creationId="{6B180CF2-189D-B98C-6654-75DF3375640B}"/>
-          </ac:picMkLst>
-        </pc:picChg>
-        <pc:picChg chg="del">
-          <ac:chgData name="sh ito" userId="b72e1b45a6eb2453" providerId="LiveId" clId="{4A52BE65-D49D-45EA-8A08-CAF35556917D}" dt="2026-05-04T10:12:05.140" v="63" actId="478"/>
-          <ac:picMkLst>
-            <pc:docMk/>
-            <pc:sldMk cId="1216089840" sldId="264"/>
-            <ac:picMk id="82" creationId="{43363682-DF42-25DA-E3DC-6ADA1E4DC76F}"/>
-          </ac:picMkLst>
-        </pc:picChg>
-        <pc:picChg chg="del">
-          <ac:chgData name="sh ito" userId="b72e1b45a6eb2453" providerId="LiveId" clId="{4A52BE65-D49D-45EA-8A08-CAF35556917D}" dt="2026-05-04T10:12:05.140" v="63" actId="478"/>
-          <ac:picMkLst>
-            <pc:docMk/>
-            <pc:sldMk cId="1216089840" sldId="264"/>
-            <ac:picMk id="83" creationId="{0CC50800-D782-9C96-2A35-E938E34D7C34}"/>
-          </ac:picMkLst>
-        </pc:picChg>
-        <pc:picChg chg="del">
-          <ac:chgData name="sh ito" userId="b72e1b45a6eb2453" providerId="LiveId" clId="{4A52BE65-D49D-45EA-8A08-CAF35556917D}" dt="2026-05-04T10:12:05.140" v="63" actId="478"/>
-          <ac:picMkLst>
-            <pc:docMk/>
-            <pc:sldMk cId="1216089840" sldId="264"/>
-            <ac:picMk id="111" creationId="{DB2D210D-9FDB-3A61-4FCA-1DD690949547}"/>
-          </ac:picMkLst>
-        </pc:picChg>
-        <pc:picChg chg="del">
-          <ac:chgData name="sh ito" userId="b72e1b45a6eb2453" providerId="LiveId" clId="{4A52BE65-D49D-45EA-8A08-CAF35556917D}" dt="2026-05-04T10:12:07.771" v="64" actId="478"/>
-          <ac:picMkLst>
-            <pc:docMk/>
-            <pc:sldMk cId="1216089840" sldId="264"/>
-            <ac:picMk id="119" creationId="{B1A6A65F-0058-9040-D59F-8515F1D6AC3A}"/>
-          </ac:picMkLst>
-        </pc:picChg>
-        <pc:picChg chg="del">
-          <ac:chgData name="sh ito" userId="b72e1b45a6eb2453" providerId="LiveId" clId="{4A52BE65-D49D-45EA-8A08-CAF35556917D}" dt="2026-05-04T10:12:05.140" v="63" actId="478"/>
-          <ac:picMkLst>
-            <pc:docMk/>
-            <pc:sldMk cId="1216089840" sldId="264"/>
-            <ac:picMk id="120" creationId="{E5B5BBC2-FEBE-9264-556A-91041209441F}"/>
-          </ac:picMkLst>
-        </pc:picChg>
-        <pc:picChg chg="del">
-          <ac:chgData name="sh ito" userId="b72e1b45a6eb2453" providerId="LiveId" clId="{4A52BE65-D49D-45EA-8A08-CAF35556917D}" dt="2026-05-04T10:12:07.771" v="64" actId="478"/>
-          <ac:picMkLst>
-            <pc:docMk/>
-            <pc:sldMk cId="1216089840" sldId="264"/>
-            <ac:picMk id="121" creationId="{4B788CD0-CF0A-8623-0E56-ED9A28FAFC6F}"/>
-          </ac:picMkLst>
-        </pc:picChg>
-        <pc:picChg chg="del">
-          <ac:chgData name="sh ito" userId="b72e1b45a6eb2453" providerId="LiveId" clId="{4A52BE65-D49D-45EA-8A08-CAF35556917D}" dt="2026-05-04T10:12:07.771" v="64" actId="478"/>
-          <ac:picMkLst>
-            <pc:docMk/>
-            <pc:sldMk cId="1216089840" sldId="264"/>
-            <ac:picMk id="122" creationId="{5F2E4269-9920-823C-F1B9-9A257010A1D3}"/>
-          </ac:picMkLst>
-        </pc:picChg>
-        <pc:picChg chg="del">
-          <ac:chgData name="sh ito" userId="b72e1b45a6eb2453" providerId="LiveId" clId="{4A52BE65-D49D-45EA-8A08-CAF35556917D}" dt="2026-05-04T10:12:05.140" v="63" actId="478"/>
-          <ac:picMkLst>
-            <pc:docMk/>
-            <pc:sldMk cId="1216089840" sldId="264"/>
-            <ac:picMk id="123" creationId="{C2F20234-B4B3-E153-41C3-BEB6BD8F03CC}"/>
-          </ac:picMkLst>
-        </pc:picChg>
-        <pc:picChg chg="del">
-          <ac:chgData name="sh ito" userId="b72e1b45a6eb2453" providerId="LiveId" clId="{4A52BE65-D49D-45EA-8A08-CAF35556917D}" dt="2026-05-04T10:12:07.771" v="64" actId="478"/>
-          <ac:picMkLst>
-            <pc:docMk/>
-            <pc:sldMk cId="1216089840" sldId="264"/>
-            <ac:picMk id="124" creationId="{47C90486-F633-149F-B64A-C6B4D649C7A9}"/>
-          </ac:picMkLst>
-        </pc:picChg>
-        <pc:picChg chg="del">
-          <ac:chgData name="sh ito" userId="b72e1b45a6eb2453" providerId="LiveId" clId="{4A52BE65-D49D-45EA-8A08-CAF35556917D}" dt="2026-05-04T10:12:07.771" v="64" actId="478"/>
-          <ac:picMkLst>
-            <pc:docMk/>
-            <pc:sldMk cId="1216089840" sldId="264"/>
-            <ac:picMk id="125" creationId="{CB4D7704-4588-F50E-457D-B839A6A0FDDD}"/>
-          </ac:picMkLst>
-        </pc:picChg>
-        <pc:picChg chg="del">
-          <ac:chgData name="sh ito" userId="b72e1b45a6eb2453" providerId="LiveId" clId="{4A52BE65-D49D-45EA-8A08-CAF35556917D}" dt="2026-05-04T10:12:07.771" v="64" actId="478"/>
-          <ac:picMkLst>
-            <pc:docMk/>
-            <pc:sldMk cId="1216089840" sldId="264"/>
-            <ac:picMk id="126" creationId="{BEB67C41-37B2-A76C-3E35-D06E0D75CE9E}"/>
-          </ac:picMkLst>
-        </pc:picChg>
-        <pc:picChg chg="del">
-          <ac:chgData name="sh ito" userId="b72e1b45a6eb2453" providerId="LiveId" clId="{4A52BE65-D49D-45EA-8A08-CAF35556917D}" dt="2026-05-04T10:12:05.140" v="63" actId="478"/>
-          <ac:picMkLst>
-            <pc:docMk/>
-            <pc:sldMk cId="1216089840" sldId="264"/>
-            <ac:picMk id="1026" creationId="{306C2FD3-DD06-2A28-FBB0-8F0522B0CADE}"/>
-          </ac:picMkLst>
-        </pc:picChg>
-        <pc:picChg chg="del">
-          <ac:chgData name="sh ito" userId="b72e1b45a6eb2453" providerId="LiveId" clId="{4A52BE65-D49D-45EA-8A08-CAF35556917D}" dt="2026-05-04T10:12:07.771" v="64" actId="478"/>
-          <ac:picMkLst>
-            <pc:docMk/>
-            <pc:sldMk cId="1216089840" sldId="264"/>
-            <ac:picMk id="1030" creationId="{D58EAE90-C816-0FDC-1325-2A88C58BF057}"/>
-          </ac:picMkLst>
-        </pc:picChg>
       </pc:sldChg>
       <pc:sldChg chg="addSp delSp modSp add mod">
         <pc:chgData name="sh ito" userId="b72e1b45a6eb2453" providerId="LiveId" clId="{4A52BE65-D49D-45EA-8A08-CAF35556917D}" dt="2026-05-05T08:55:22.337" v="3610" actId="20577"/>
@@ -945,22 +752,6 @@
             <pc:docMk/>
             <pc:sldMk cId="792282740" sldId="265"/>
             <ac:spMk id="3" creationId="{C74B8370-F333-536C-ACBD-9F958FEED7EF}"/>
-          </ac:spMkLst>
-        </pc:spChg>
-        <pc:spChg chg="del">
-          <ac:chgData name="sh ito" userId="b72e1b45a6eb2453" providerId="LiveId" clId="{4A52BE65-D49D-45EA-8A08-CAF35556917D}" dt="2026-05-04T10:19:16.710" v="451" actId="478"/>
-          <ac:spMkLst>
-            <pc:docMk/>
-            <pc:sldMk cId="792282740" sldId="265"/>
-            <ac:spMk id="3" creationId="{DF14EEE9-18B2-87D0-4FE1-D5C989336A79}"/>
-          </ac:spMkLst>
-        </pc:spChg>
-        <pc:spChg chg="del">
-          <ac:chgData name="sh ito" userId="b72e1b45a6eb2453" providerId="LiveId" clId="{4A52BE65-D49D-45EA-8A08-CAF35556917D}" dt="2026-05-04T10:19:16.710" v="451" actId="478"/>
-          <ac:spMkLst>
-            <pc:docMk/>
-            <pc:sldMk cId="792282740" sldId="265"/>
-            <ac:spMk id="4" creationId="{D55D3913-0280-0DB0-FE7B-B5E723FA9013}"/>
           </ac:spMkLst>
         </pc:spChg>
         <pc:spChg chg="add mod">
@@ -995,92 +786,12 @@
             <ac:spMk id="9" creationId="{0244E92C-E8F6-2BB9-39DE-4F8E53645886}"/>
           </ac:spMkLst>
         </pc:spChg>
-        <pc:spChg chg="add mod">
-          <ac:chgData name="sh ito" userId="b72e1b45a6eb2453" providerId="LiveId" clId="{4A52BE65-D49D-45EA-8A08-CAF35556917D}" dt="2026-05-04T10:27:54.491" v="917"/>
-          <ac:spMkLst>
-            <pc:docMk/>
-            <pc:sldMk cId="792282740" sldId="265"/>
-            <ac:spMk id="14" creationId="{702DBC02-C80F-3280-7AC3-B11479FF99B7}"/>
-          </ac:spMkLst>
-        </pc:spChg>
-        <pc:spChg chg="add mod">
-          <ac:chgData name="sh ito" userId="b72e1b45a6eb2453" providerId="LiveId" clId="{4A52BE65-D49D-45EA-8A08-CAF35556917D}" dt="2026-05-04T10:27:54.491" v="917"/>
-          <ac:spMkLst>
-            <pc:docMk/>
-            <pc:sldMk cId="792282740" sldId="265"/>
-            <ac:spMk id="15" creationId="{C866D820-1FF0-EA79-73C3-A2B6A9D20C03}"/>
-          </ac:spMkLst>
-        </pc:spChg>
-        <pc:spChg chg="add mod">
-          <ac:chgData name="sh ito" userId="b72e1b45a6eb2453" providerId="LiveId" clId="{4A52BE65-D49D-45EA-8A08-CAF35556917D}" dt="2026-05-04T10:27:54.491" v="917"/>
-          <ac:spMkLst>
-            <pc:docMk/>
-            <pc:sldMk cId="792282740" sldId="265"/>
-            <ac:spMk id="16" creationId="{7EA246D1-1AF2-A9E8-6A54-CD0ED2B0B697}"/>
-          </ac:spMkLst>
-        </pc:spChg>
-        <pc:spChg chg="add mod">
-          <ac:chgData name="sh ito" userId="b72e1b45a6eb2453" providerId="LiveId" clId="{4A52BE65-D49D-45EA-8A08-CAF35556917D}" dt="2026-05-04T10:27:54.491" v="917"/>
-          <ac:spMkLst>
-            <pc:docMk/>
-            <pc:sldMk cId="792282740" sldId="265"/>
-            <ac:spMk id="17" creationId="{88D0EE2E-4CD5-70B7-B6DF-4C40B511F019}"/>
-          </ac:spMkLst>
-        </pc:spChg>
-        <pc:spChg chg="add mod">
-          <ac:chgData name="sh ito" userId="b72e1b45a6eb2453" providerId="LiveId" clId="{4A52BE65-D49D-45EA-8A08-CAF35556917D}" dt="2026-05-04T10:27:54.491" v="917"/>
-          <ac:spMkLst>
-            <pc:docMk/>
-            <pc:sldMk cId="792282740" sldId="265"/>
-            <ac:spMk id="18" creationId="{4FD006AB-EA03-1B3C-43B3-1DD23E5A329C}"/>
-          </ac:spMkLst>
-        </pc:spChg>
-        <pc:spChg chg="add mod">
-          <ac:chgData name="sh ito" userId="b72e1b45a6eb2453" providerId="LiveId" clId="{4A52BE65-D49D-45EA-8A08-CAF35556917D}" dt="2026-05-04T10:27:54.491" v="917"/>
-          <ac:spMkLst>
-            <pc:docMk/>
-            <pc:sldMk cId="792282740" sldId="265"/>
-            <ac:spMk id="19" creationId="{78EE6090-3FAD-0759-FC3B-638D9E84A63D}"/>
-          </ac:spMkLst>
-        </pc:spChg>
-        <pc:spChg chg="add mod">
-          <ac:chgData name="sh ito" userId="b72e1b45a6eb2453" providerId="LiveId" clId="{4A52BE65-D49D-45EA-8A08-CAF35556917D}" dt="2026-05-04T10:27:54.491" v="917"/>
-          <ac:spMkLst>
-            <pc:docMk/>
-            <pc:sldMk cId="792282740" sldId="265"/>
-            <ac:spMk id="20" creationId="{5846CD89-F259-9CD5-D0E5-0D27648FC399}"/>
-          </ac:spMkLst>
-        </pc:spChg>
         <pc:spChg chg="mod">
           <ac:chgData name="sh ito" userId="b72e1b45a6eb2453" providerId="LiveId" clId="{4A52BE65-D49D-45EA-8A08-CAF35556917D}" dt="2026-05-04T10:25:00.053" v="900" actId="2711"/>
           <ac:spMkLst>
             <pc:docMk/>
             <pc:sldMk cId="792282740" sldId="265"/>
             <ac:spMk id="21" creationId="{174CA47C-E9BE-6C3A-9B73-1DE71E3983A7}"/>
-          </ac:spMkLst>
-        </pc:spChg>
-        <pc:spChg chg="add mod">
-          <ac:chgData name="sh ito" userId="b72e1b45a6eb2453" providerId="LiveId" clId="{4A52BE65-D49D-45EA-8A08-CAF35556917D}" dt="2026-05-04T10:27:54.491" v="917"/>
-          <ac:spMkLst>
-            <pc:docMk/>
-            <pc:sldMk cId="792282740" sldId="265"/>
-            <ac:spMk id="22" creationId="{F8D54468-2E31-5A22-6C3F-4EC7C35D1EFF}"/>
-          </ac:spMkLst>
-        </pc:spChg>
-        <pc:spChg chg="add mod">
-          <ac:chgData name="sh ito" userId="b72e1b45a6eb2453" providerId="LiveId" clId="{4A52BE65-D49D-45EA-8A08-CAF35556917D}" dt="2026-05-04T10:27:54.491" v="917"/>
-          <ac:spMkLst>
-            <pc:docMk/>
-            <pc:sldMk cId="792282740" sldId="265"/>
-            <ac:spMk id="23" creationId="{D2D992D3-BC5C-39A2-41B1-2C5A59E4CDDE}"/>
-          </ac:spMkLst>
-        </pc:spChg>
-        <pc:spChg chg="add mod">
-          <ac:chgData name="sh ito" userId="b72e1b45a6eb2453" providerId="LiveId" clId="{4A52BE65-D49D-45EA-8A08-CAF35556917D}" dt="2026-05-04T10:27:54.491" v="917"/>
-          <ac:spMkLst>
-            <pc:docMk/>
-            <pc:sldMk cId="792282740" sldId="265"/>
-            <ac:spMk id="24" creationId="{4B348543-1056-09AD-49AE-08D25515E94A}"/>
           </ac:spMkLst>
         </pc:spChg>
         <pc:spChg chg="mod">
@@ -1418,22 +1129,6 @@
             <ac:spMk id="10" creationId="{6678427C-DB9B-B406-DB44-C0F0944B032E}"/>
           </ac:spMkLst>
         </pc:spChg>
-        <pc:spChg chg="add del mod">
-          <ac:chgData name="sh ito" userId="b72e1b45a6eb2453" providerId="LiveId" clId="{4A52BE65-D49D-45EA-8A08-CAF35556917D}" dt="2026-05-04T10:44:30.316" v="1557" actId="478"/>
-          <ac:spMkLst>
-            <pc:docMk/>
-            <pc:sldMk cId="3745006878" sldId="266"/>
-            <ac:spMk id="11" creationId="{9223D5C7-4F93-A049-0B62-E1A6A3E31E02}"/>
-          </ac:spMkLst>
-        </pc:spChg>
-        <pc:spChg chg="add del mod">
-          <ac:chgData name="sh ito" userId="b72e1b45a6eb2453" providerId="LiveId" clId="{4A52BE65-D49D-45EA-8A08-CAF35556917D}" dt="2026-05-04T13:53:53.875" v="3551" actId="478"/>
-          <ac:spMkLst>
-            <pc:docMk/>
-            <pc:sldMk cId="3745006878" sldId="266"/>
-            <ac:spMk id="12" creationId="{FDFE5835-65AD-1AD4-9742-5C8DD17FE472}"/>
-          </ac:spMkLst>
-        </pc:spChg>
         <pc:spChg chg="mod">
           <ac:chgData name="sh ito" userId="b72e1b45a6eb2453" providerId="LiveId" clId="{4A52BE65-D49D-45EA-8A08-CAF35556917D}" dt="2026-05-04T10:41:19.759" v="1528" actId="207"/>
           <ac:spMkLst>
@@ -1643,14 +1338,6 @@
           </ac:spMkLst>
         </pc:spChg>
         <pc:picChg chg="add mod">
-          <ac:chgData name="sh ito" userId="b72e1b45a6eb2453" providerId="LiveId" clId="{4A52BE65-D49D-45EA-8A08-CAF35556917D}" dt="2026-05-04T10:32:48.304" v="934" actId="1076"/>
-          <ac:picMkLst>
-            <pc:docMk/>
-            <pc:sldMk cId="3745006878" sldId="266"/>
-            <ac:picMk id="3" creationId="{2EEA57ED-267A-E944-E478-71FB8F2D6C39}"/>
-          </ac:picMkLst>
-        </pc:picChg>
-        <pc:picChg chg="add mod">
           <ac:chgData name="sh ito" userId="b72e1b45a6eb2453" providerId="LiveId" clId="{4A52BE65-D49D-45EA-8A08-CAF35556917D}" dt="2026-05-04T10:32:55.911" v="938" actId="167"/>
           <ac:picMkLst>
             <pc:docMk/>
@@ -1658,24 +1345,9 @@
             <ac:picMk id="4" creationId="{E4DC740C-D742-DBAF-DD49-41515156A8C2}"/>
           </ac:picMkLst>
         </pc:picChg>
-        <pc:picChg chg="add del">
-          <ac:chgData name="sh ito" userId="b72e1b45a6eb2453" providerId="LiveId" clId="{4A52BE65-D49D-45EA-8A08-CAF35556917D}" dt="2026-05-04T10:32:56.920" v="939" actId="478"/>
-          <ac:picMkLst>
-            <pc:docMk/>
-            <pc:sldMk cId="3745006878" sldId="266"/>
-            <ac:picMk id="25" creationId="{A072BC0A-9EEA-3682-05CF-275AFC332F80}"/>
-          </ac:picMkLst>
-        </pc:picChg>
-      </pc:sldChg>
-      <pc:sldChg chg="new del">
-        <pc:chgData name="sh ito" userId="b72e1b45a6eb2453" providerId="LiveId" clId="{4A52BE65-D49D-45EA-8A08-CAF35556917D}" dt="2026-05-04T10:45:29.504" v="1587" actId="680"/>
-        <pc:sldMkLst>
-          <pc:docMk/>
-          <pc:sldMk cId="3841733666" sldId="267"/>
-        </pc:sldMkLst>
       </pc:sldChg>
       <pc:sldChg chg="addSp delSp modSp add mod ord">
-        <pc:chgData name="sh ito" userId="b72e1b45a6eb2453" providerId="LiveId" clId="{4A52BE65-D49D-45EA-8A08-CAF35556917D}" dt="2026-05-04T11:10:02.690" v="3369" actId="207"/>
+        <pc:chgData name="sh ito" userId="b72e1b45a6eb2453" providerId="LiveId" clId="{4A52BE65-D49D-45EA-8A08-CAF35556917D}" dt="2026-05-17T04:50:53.163" v="3908" actId="403"/>
         <pc:sldMkLst>
           <pc:docMk/>
           <pc:sldMk cId="3986363018" sldId="267"/>
@@ -1689,31 +1361,15 @@
           </ac:spMkLst>
         </pc:spChg>
         <pc:spChg chg="add mod">
-          <ac:chgData name="sh ito" userId="b72e1b45a6eb2453" providerId="LiveId" clId="{4A52BE65-D49D-45EA-8A08-CAF35556917D}" dt="2026-05-04T10:52:03.535" v="2268" actId="1035"/>
+          <ac:chgData name="sh ito" userId="b72e1b45a6eb2453" providerId="LiveId" clId="{4A52BE65-D49D-45EA-8A08-CAF35556917D}" dt="2026-05-17T04:48:40.095" v="3851"/>
           <ac:spMkLst>
             <pc:docMk/>
             <pc:sldMk cId="3986363018" sldId="267"/>
             <ac:spMk id="5" creationId="{0D3D5673-81BD-CFBC-D84A-F4AF6FE952C6}"/>
           </ac:spMkLst>
         </pc:spChg>
-        <pc:spChg chg="del">
-          <ac:chgData name="sh ito" userId="b72e1b45a6eb2453" providerId="LiveId" clId="{4A52BE65-D49D-45EA-8A08-CAF35556917D}" dt="2026-05-04T10:46:14.865" v="1674" actId="478"/>
-          <ac:spMkLst>
-            <pc:docMk/>
-            <pc:sldMk cId="3986363018" sldId="267"/>
-            <ac:spMk id="6" creationId="{27DCDE80-896A-7AED-9033-B92D11142F02}"/>
-          </ac:spMkLst>
-        </pc:spChg>
-        <pc:spChg chg="del">
-          <ac:chgData name="sh ito" userId="b72e1b45a6eb2453" providerId="LiveId" clId="{4A52BE65-D49D-45EA-8A08-CAF35556917D}" dt="2026-05-04T10:46:14.865" v="1674" actId="478"/>
-          <ac:spMkLst>
-            <pc:docMk/>
-            <pc:sldMk cId="3986363018" sldId="267"/>
-            <ac:spMk id="7" creationId="{25720E7D-8478-CA6D-4E29-12E153CE6E24}"/>
-          </ac:spMkLst>
-        </pc:spChg>
         <pc:spChg chg="add mod">
-          <ac:chgData name="sh ito" userId="b72e1b45a6eb2453" providerId="LiveId" clId="{4A52BE65-D49D-45EA-8A08-CAF35556917D}" dt="2026-05-04T10:51:43.189" v="2266" actId="207"/>
+          <ac:chgData name="sh ito" userId="b72e1b45a6eb2453" providerId="LiveId" clId="{4A52BE65-D49D-45EA-8A08-CAF35556917D}" dt="2026-05-17T04:48:00.636" v="3850" actId="207"/>
           <ac:spMkLst>
             <pc:docMk/>
             <pc:sldMk cId="3986363018" sldId="267"/>
@@ -1721,7 +1377,7 @@
           </ac:spMkLst>
         </pc:spChg>
         <pc:spChg chg="mod">
-          <ac:chgData name="sh ito" userId="b72e1b45a6eb2453" providerId="LiveId" clId="{4A52BE65-D49D-45EA-8A08-CAF35556917D}" dt="2026-05-04T10:51:40.396" v="2265" actId="207"/>
+          <ac:chgData name="sh ito" userId="b72e1b45a6eb2453" providerId="LiveId" clId="{4A52BE65-D49D-45EA-8A08-CAF35556917D}" dt="2026-05-17T04:48:55.811" v="3853"/>
           <ac:spMkLst>
             <pc:docMk/>
             <pc:sldMk cId="3986363018" sldId="267"/>
@@ -1729,7 +1385,7 @@
           </ac:spMkLst>
         </pc:spChg>
         <pc:spChg chg="mod">
-          <ac:chgData name="sh ito" userId="b72e1b45a6eb2453" providerId="LiveId" clId="{4A52BE65-D49D-45EA-8A08-CAF35556917D}" dt="2026-05-04T10:51:40.396" v="2265" actId="207"/>
+          <ac:chgData name="sh ito" userId="b72e1b45a6eb2453" providerId="LiveId" clId="{4A52BE65-D49D-45EA-8A08-CAF35556917D}" dt="2026-05-17T04:50:53.163" v="3908" actId="403"/>
           <ac:spMkLst>
             <pc:docMk/>
             <pc:sldMk cId="3986363018" sldId="267"/>
@@ -1737,7 +1393,7 @@
           </ac:spMkLst>
         </pc:spChg>
         <pc:spChg chg="mod">
-          <ac:chgData name="sh ito" userId="b72e1b45a6eb2453" providerId="LiveId" clId="{4A52BE65-D49D-45EA-8A08-CAF35556917D}" dt="2026-05-04T10:51:40.396" v="2265" actId="207"/>
+          <ac:chgData name="sh ito" userId="b72e1b45a6eb2453" providerId="LiveId" clId="{4A52BE65-D49D-45EA-8A08-CAF35556917D}" dt="2026-05-17T04:50:39.984" v="3906" actId="1076"/>
           <ac:spMkLst>
             <pc:docMk/>
             <pc:sldMk cId="3986363018" sldId="267"/>
@@ -1745,15 +1401,15 @@
           </ac:spMkLst>
         </pc:spChg>
         <pc:spChg chg="mod">
-          <ac:chgData name="sh ito" userId="b72e1b45a6eb2453" providerId="LiveId" clId="{4A52BE65-D49D-45EA-8A08-CAF35556917D}" dt="2026-05-04T10:51:20.293" v="2264" actId="207"/>
+          <ac:chgData name="sh ito" userId="b72e1b45a6eb2453" providerId="LiveId" clId="{4A52BE65-D49D-45EA-8A08-CAF35556917D}" dt="2026-05-17T04:47:59.312" v="3849" actId="207"/>
           <ac:spMkLst>
             <pc:docMk/>
             <pc:sldMk cId="3986363018" sldId="267"/>
             <ac:spMk id="13" creationId="{A2A33A55-A4EE-8439-166A-441C6F5D0952}"/>
           </ac:spMkLst>
         </pc:spChg>
-        <pc:spChg chg="add mod">
-          <ac:chgData name="sh ito" userId="b72e1b45a6eb2453" providerId="LiveId" clId="{4A52BE65-D49D-45EA-8A08-CAF35556917D}" dt="2026-05-04T10:51:40.396" v="2265" actId="207"/>
+        <pc:spChg chg="add del mod">
+          <ac:chgData name="sh ito" userId="b72e1b45a6eb2453" providerId="LiveId" clId="{4A52BE65-D49D-45EA-8A08-CAF35556917D}" dt="2026-05-17T04:49:33.567" v="3860" actId="478"/>
           <ac:spMkLst>
             <pc:docMk/>
             <pc:sldMk cId="3986363018" sldId="267"/>
@@ -1761,43 +1417,11 @@
           </ac:spMkLst>
         </pc:spChg>
         <pc:spChg chg="add mod">
-          <ac:chgData name="sh ito" userId="b72e1b45a6eb2453" providerId="LiveId" clId="{4A52BE65-D49D-45EA-8A08-CAF35556917D}" dt="2026-05-04T10:51:40.396" v="2265" actId="207"/>
+          <ac:chgData name="sh ito" userId="b72e1b45a6eb2453" providerId="LiveId" clId="{4A52BE65-D49D-45EA-8A08-CAF35556917D}" dt="2026-05-17T04:49:08.167" v="3854"/>
           <ac:spMkLst>
             <pc:docMk/>
             <pc:sldMk cId="3986363018" sldId="267"/>
             <ac:spMk id="15" creationId="{2352DCE2-EFA9-E13F-B46F-8D73704FF3BE}"/>
-          </ac:spMkLst>
-        </pc:spChg>
-        <pc:spChg chg="add del mod">
-          <ac:chgData name="sh ito" userId="b72e1b45a6eb2453" providerId="LiveId" clId="{4A52BE65-D49D-45EA-8A08-CAF35556917D}" dt="2026-05-04T10:46:32.936" v="1678" actId="478"/>
-          <ac:spMkLst>
-            <pc:docMk/>
-            <pc:sldMk cId="3986363018" sldId="267"/>
-            <ac:spMk id="20" creationId="{5ED59126-989F-496C-2162-2062C6823220}"/>
-          </ac:spMkLst>
-        </pc:spChg>
-        <pc:spChg chg="del mod">
-          <ac:chgData name="sh ito" userId="b72e1b45a6eb2453" providerId="LiveId" clId="{4A52BE65-D49D-45EA-8A08-CAF35556917D}" dt="2026-05-04T10:46:56.951" v="1686" actId="478"/>
-          <ac:spMkLst>
-            <pc:docMk/>
-            <pc:sldMk cId="3986363018" sldId="267"/>
-            <ac:spMk id="22" creationId="{453842D6-DDF3-5F27-72FB-77D67A337EC4}"/>
-          </ac:spMkLst>
-        </pc:spChg>
-        <pc:spChg chg="add del mod">
-          <ac:chgData name="sh ito" userId="b72e1b45a6eb2453" providerId="LiveId" clId="{4A52BE65-D49D-45EA-8A08-CAF35556917D}" dt="2026-05-04T10:46:56.951" v="1686" actId="478"/>
-          <ac:spMkLst>
-            <pc:docMk/>
-            <pc:sldMk cId="3986363018" sldId="267"/>
-            <ac:spMk id="23" creationId="{9D186FF6-ADA3-BBA7-364B-DB2F31F09413}"/>
-          </ac:spMkLst>
-        </pc:spChg>
-        <pc:spChg chg="del mod">
-          <ac:chgData name="sh ito" userId="b72e1b45a6eb2453" providerId="LiveId" clId="{4A52BE65-D49D-45EA-8A08-CAF35556917D}" dt="2026-05-04T10:46:56.951" v="1686" actId="478"/>
-          <ac:spMkLst>
-            <pc:docMk/>
-            <pc:sldMk cId="3986363018" sldId="267"/>
-            <ac:spMk id="24" creationId="{738C89DF-F5E7-3D07-DCE6-C1998F4FDE9A}"/>
           </ac:spMkLst>
         </pc:spChg>
         <pc:spChg chg="add mod">
@@ -1816,8 +1440,8 @@
             <ac:spMk id="34" creationId="{D43FD311-456B-AF80-8816-87CDE13CE831}"/>
           </ac:spMkLst>
         </pc:spChg>
-        <pc:spChg chg="add mod">
-          <ac:chgData name="sh ito" userId="b72e1b45a6eb2453" providerId="LiveId" clId="{4A52BE65-D49D-45EA-8A08-CAF35556917D}" dt="2026-05-04T10:51:40.396" v="2265" actId="207"/>
+        <pc:spChg chg="add del mod">
+          <ac:chgData name="sh ito" userId="b72e1b45a6eb2453" providerId="LiveId" clId="{4A52BE65-D49D-45EA-8A08-CAF35556917D}" dt="2026-05-17T04:49:39.527" v="3861" actId="478"/>
           <ac:spMkLst>
             <pc:docMk/>
             <pc:sldMk cId="3986363018" sldId="267"/>
@@ -1872,86 +1496,6 @@
             <ac:spMk id="66" creationId="{DE791A86-5B5E-9E45-BE58-3E2D447C8BBA}"/>
           </ac:spMkLst>
         </pc:spChg>
-        <pc:spChg chg="del">
-          <ac:chgData name="sh ito" userId="b72e1b45a6eb2453" providerId="LiveId" clId="{4A52BE65-D49D-45EA-8A08-CAF35556917D}" dt="2026-05-04T10:45:41.450" v="1591" actId="478"/>
-          <ac:spMkLst>
-            <pc:docMk/>
-            <pc:sldMk cId="3986363018" sldId="267"/>
-            <ac:spMk id="68" creationId="{BC8E09A7-1340-5CD0-12D6-DD110276A343}"/>
-          </ac:spMkLst>
-        </pc:spChg>
-        <pc:spChg chg="del">
-          <ac:chgData name="sh ito" userId="b72e1b45a6eb2453" providerId="LiveId" clId="{4A52BE65-D49D-45EA-8A08-CAF35556917D}" dt="2026-05-04T10:45:41.450" v="1591" actId="478"/>
-          <ac:spMkLst>
-            <pc:docMk/>
-            <pc:sldMk cId="3986363018" sldId="267"/>
-            <ac:spMk id="78" creationId="{0A6D1408-7F27-9BA4-6BFB-929BBBF2A5FE}"/>
-          </ac:spMkLst>
-        </pc:spChg>
-        <pc:spChg chg="del">
-          <ac:chgData name="sh ito" userId="b72e1b45a6eb2453" providerId="LiveId" clId="{4A52BE65-D49D-45EA-8A08-CAF35556917D}" dt="2026-05-04T10:45:41.450" v="1591" actId="478"/>
-          <ac:spMkLst>
-            <pc:docMk/>
-            <pc:sldMk cId="3986363018" sldId="267"/>
-            <ac:spMk id="79" creationId="{1FEF4E72-3622-E2AF-1C84-CB277D59B751}"/>
-          </ac:spMkLst>
-        </pc:spChg>
-        <pc:spChg chg="del">
-          <ac:chgData name="sh ito" userId="b72e1b45a6eb2453" providerId="LiveId" clId="{4A52BE65-D49D-45EA-8A08-CAF35556917D}" dt="2026-05-04T10:45:41.450" v="1591" actId="478"/>
-          <ac:spMkLst>
-            <pc:docMk/>
-            <pc:sldMk cId="3986363018" sldId="267"/>
-            <ac:spMk id="84" creationId="{22AC9CFE-E168-14C3-7163-AE903D3C9464}"/>
-          </ac:spMkLst>
-        </pc:spChg>
-        <pc:spChg chg="del">
-          <ac:chgData name="sh ito" userId="b72e1b45a6eb2453" providerId="LiveId" clId="{4A52BE65-D49D-45EA-8A08-CAF35556917D}" dt="2026-05-04T10:45:41.450" v="1591" actId="478"/>
-          <ac:spMkLst>
-            <pc:docMk/>
-            <pc:sldMk cId="3986363018" sldId="267"/>
-            <ac:spMk id="96" creationId="{5A3FFBFE-2C06-3000-BC04-4304AABD257F}"/>
-          </ac:spMkLst>
-        </pc:spChg>
-        <pc:spChg chg="del">
-          <ac:chgData name="sh ito" userId="b72e1b45a6eb2453" providerId="LiveId" clId="{4A52BE65-D49D-45EA-8A08-CAF35556917D}" dt="2026-05-04T10:45:41.450" v="1591" actId="478"/>
-          <ac:spMkLst>
-            <pc:docMk/>
-            <pc:sldMk cId="3986363018" sldId="267"/>
-            <ac:spMk id="99" creationId="{8B6DAA3E-2451-5198-0AFC-1FD33C3BED3F}"/>
-          </ac:spMkLst>
-        </pc:spChg>
-        <pc:spChg chg="del">
-          <ac:chgData name="sh ito" userId="b72e1b45a6eb2453" providerId="LiveId" clId="{4A52BE65-D49D-45EA-8A08-CAF35556917D}" dt="2026-05-04T10:45:41.450" v="1591" actId="478"/>
-          <ac:spMkLst>
-            <pc:docMk/>
-            <pc:sldMk cId="3986363018" sldId="267"/>
-            <ac:spMk id="103" creationId="{DCE21BED-5B6F-ECDD-9A2C-042A1E9E5FFD}"/>
-          </ac:spMkLst>
-        </pc:spChg>
-        <pc:spChg chg="del">
-          <ac:chgData name="sh ito" userId="b72e1b45a6eb2453" providerId="LiveId" clId="{4A52BE65-D49D-45EA-8A08-CAF35556917D}" dt="2026-05-04T10:45:41.450" v="1591" actId="478"/>
-          <ac:spMkLst>
-            <pc:docMk/>
-            <pc:sldMk cId="3986363018" sldId="267"/>
-            <ac:spMk id="108" creationId="{1390814C-E2C7-8D7F-2ACB-79CF3E824614}"/>
-          </ac:spMkLst>
-        </pc:spChg>
-        <pc:spChg chg="del">
-          <ac:chgData name="sh ito" userId="b72e1b45a6eb2453" providerId="LiveId" clId="{4A52BE65-D49D-45EA-8A08-CAF35556917D}" dt="2026-05-04T10:45:41.450" v="1591" actId="478"/>
-          <ac:spMkLst>
-            <pc:docMk/>
-            <pc:sldMk cId="3986363018" sldId="267"/>
-            <ac:spMk id="114" creationId="{3B8010FE-1A3B-1B9B-8481-58F30CCF511F}"/>
-          </ac:spMkLst>
-        </pc:spChg>
-        <pc:spChg chg="del">
-          <ac:chgData name="sh ito" userId="b72e1b45a6eb2453" providerId="LiveId" clId="{4A52BE65-D49D-45EA-8A08-CAF35556917D}" dt="2026-05-04T10:45:41.450" v="1591" actId="478"/>
-          <ac:spMkLst>
-            <pc:docMk/>
-            <pc:sldMk cId="3986363018" sldId="267"/>
-            <ac:spMk id="117" creationId="{14590701-A0AD-4FBE-190B-67705CF406AA}"/>
-          </ac:spMkLst>
-        </pc:spChg>
         <pc:grpChg chg="mod">
           <ac:chgData name="sh ito" userId="b72e1b45a6eb2453" providerId="LiveId" clId="{4A52BE65-D49D-45EA-8A08-CAF35556917D}" dt="2026-05-04T10:51:40.396" v="2265" actId="207"/>
           <ac:grpSpMkLst>
@@ -1960,14 +1504,14 @@
             <ac:grpSpMk id="9" creationId="{FC1EF7EE-2080-991E-8B7D-ED094624163B}"/>
           </ac:grpSpMkLst>
         </pc:grpChg>
-        <pc:picChg chg="add del mod">
-          <ac:chgData name="sh ito" userId="b72e1b45a6eb2453" providerId="LiveId" clId="{4A52BE65-D49D-45EA-8A08-CAF35556917D}" dt="2026-05-04T11:04:21.620" v="3012" actId="478"/>
-          <ac:picMkLst>
+        <pc:grpChg chg="mod">
+          <ac:chgData name="sh ito" userId="b72e1b45a6eb2453" providerId="LiveId" clId="{4A52BE65-D49D-45EA-8A08-CAF35556917D}" dt="2026-05-17T04:50:18.172" v="3891" actId="14100"/>
+          <ac:grpSpMkLst>
             <pc:docMk/>
             <pc:sldMk cId="3986363018" sldId="267"/>
-            <ac:picMk id="45" creationId="{F91B4227-7C5E-0047-53F7-E8AB789507AC}"/>
-          </ac:picMkLst>
-        </pc:picChg>
+            <ac:grpSpMk id="35" creationId="{3B61497C-1F3C-B929-1000-FF6CEEC20F9D}"/>
+          </ac:grpSpMkLst>
+        </pc:grpChg>
       </pc:sldChg>
       <pc:sldChg chg="addSp delSp modSp new mod">
         <pc:chgData name="sh ito" userId="b72e1b45a6eb2453" providerId="LiveId" clId="{4A52BE65-D49D-45EA-8A08-CAF35556917D}" dt="2026-05-05T08:36:31.927" v="3608" actId="207"/>
@@ -1981,14 +1525,6 @@
             <pc:docMk/>
             <pc:sldMk cId="1379221054" sldId="268"/>
             <ac:spMk id="3" creationId="{B847D851-6211-35EF-6428-584AE350AC76}"/>
-          </ac:spMkLst>
-        </pc:spChg>
-        <pc:spChg chg="mod">
-          <ac:chgData name="sh ito" userId="b72e1b45a6eb2453" providerId="LiveId" clId="{4A52BE65-D49D-45EA-8A08-CAF35556917D}" dt="2026-05-04T11:31:15.393" v="3393"/>
-          <ac:spMkLst>
-            <pc:docMk/>
-            <pc:sldMk cId="1379221054" sldId="268"/>
-            <ac:spMk id="6" creationId="{CF55A4A0-6B3E-C1A8-F92E-C0185C1A264C}"/>
           </ac:spMkLst>
         </pc:spChg>
         <pc:spChg chg="mod">
@@ -2008,22 +1544,6 @@
           </ac:spMkLst>
         </pc:spChg>
         <pc:grpChg chg="add mod">
-          <ac:chgData name="sh ito" userId="b72e1b45a6eb2453" providerId="LiveId" clId="{4A52BE65-D49D-45EA-8A08-CAF35556917D}" dt="2026-05-04T11:31:15.393" v="3393"/>
-          <ac:grpSpMkLst>
-            <pc:docMk/>
-            <pc:sldMk cId="1379221054" sldId="268"/>
-            <ac:grpSpMk id="4" creationId="{F9320D37-9201-8332-F433-838EEE48FB45}"/>
-          </ac:grpSpMkLst>
-        </pc:grpChg>
-        <pc:grpChg chg="add del mod">
-          <ac:chgData name="sh ito" userId="b72e1b45a6eb2453" providerId="LiveId" clId="{4A52BE65-D49D-45EA-8A08-CAF35556917D}" dt="2026-05-04T11:31:40.231" v="3402" actId="478"/>
-          <ac:grpSpMkLst>
-            <pc:docMk/>
-            <pc:sldMk cId="1379221054" sldId="268"/>
-            <ac:grpSpMk id="7" creationId="{8CF6F11C-DDC2-B3E2-663A-D1B3AF0AF1DA}"/>
-          </ac:grpSpMkLst>
-        </pc:grpChg>
-        <pc:grpChg chg="add mod">
           <ac:chgData name="sh ito" userId="b72e1b45a6eb2453" providerId="LiveId" clId="{4A52BE65-D49D-45EA-8A08-CAF35556917D}" dt="2026-05-04T11:32:32.231" v="3421" actId="1076"/>
           <ac:grpSpMkLst>
             <pc:docMk/>
@@ -2039,22 +1559,6 @@
             <ac:graphicFrameMk id="2" creationId="{5BB081E1-59B8-E3FA-32FF-645888479AD4}"/>
           </ac:graphicFrameMkLst>
         </pc:graphicFrameChg>
-        <pc:picChg chg="mod">
-          <ac:chgData name="sh ito" userId="b72e1b45a6eb2453" providerId="LiveId" clId="{4A52BE65-D49D-45EA-8A08-CAF35556917D}" dt="2026-05-04T11:31:15.393" v="3393"/>
-          <ac:picMkLst>
-            <pc:docMk/>
-            <pc:sldMk cId="1379221054" sldId="268"/>
-            <ac:picMk id="5" creationId="{AD8221B8-9D12-2534-41EE-F9CA3968BEF6}"/>
-          </ac:picMkLst>
-        </pc:picChg>
-        <pc:picChg chg="del mod">
-          <ac:chgData name="sh ito" userId="b72e1b45a6eb2453" providerId="LiveId" clId="{4A52BE65-D49D-45EA-8A08-CAF35556917D}" dt="2026-05-04T11:31:40.231" v="3402" actId="478"/>
-          <ac:picMkLst>
-            <pc:docMk/>
-            <pc:sldMk cId="1379221054" sldId="268"/>
-            <ac:picMk id="8" creationId="{2944AD7A-504E-5EBA-C63B-DEB3EFB89A9D}"/>
-          </ac:picMkLst>
-        </pc:picChg>
         <pc:picChg chg="add mod">
           <ac:chgData name="sh ito" userId="b72e1b45a6eb2453" providerId="LiveId" clId="{4A52BE65-D49D-45EA-8A08-CAF35556917D}" dt="2026-05-04T11:32:32.231" v="3421" actId="1076"/>
           <ac:picMkLst>
@@ -2163,7 +1667,7 @@
           <a:p>
             <a:fld id="{7B208B7B-53C7-4285-8EF1-61B92BB12964}" type="datetimeFigureOut">
               <a:rPr kumimoji="1" lang="ja-JP" altLang="en-US" smtClean="0"/>
-              <a:t>2026/5/6</a:t>
+              <a:t>2026/5/16</a:t>
             </a:fld>
             <a:endParaRPr kumimoji="1" lang="ja-JP" altLang="en-US"/>
           </a:p>
@@ -2499,7 +2003,7 @@
           <a:p>
             <a:fld id="{179CDF34-E5FE-40A1-AEE7-E48538A5EDB7}" type="datetimeFigureOut">
               <a:rPr kumimoji="1" lang="ja-JP" altLang="en-US" smtClean="0"/>
-              <a:t>2026/5/6</a:t>
+              <a:t>2026/5/16</a:t>
             </a:fld>
             <a:endParaRPr kumimoji="1" lang="ja-JP" altLang="en-US"/>
           </a:p>
@@ -11376,7 +10880,7 @@
               <a:rPr lang="en-US" altLang="ja-JP" sz="1200">
                 <a:latin typeface="Consolas" panose="020B0609020204030204" pitchFamily="49" charset="0"/>
               </a:rPr>
-              <a:t>MBindListener.ahk</a:t>
+              <a:t>Core_Hooks.ahk</a:t>
             </a:r>
           </a:p>
         </p:txBody>
@@ -11402,7 +10906,9 @@
             <a:avLst/>
           </a:prstGeom>
           <a:solidFill>
-            <a:schemeClr val="accent4"/>
+            <a:schemeClr val="bg2">
+              <a:lumMod val="50000"/>
+            </a:schemeClr>
           </a:solidFill>
           <a:ln w="12700">
             <a:solidFill>
@@ -11513,7 +11019,7 @@
                 <a:rPr lang="en-US" altLang="ja-JP" sz="1200">
                   <a:latin typeface="Consolas" panose="020B0609020204030204" pitchFamily="49" charset="0"/>
                 </a:rPr>
-                <a:t>MBind.ahk</a:t>
+                <a:t>Core_Binds.ahk</a:t>
               </a:r>
             </a:p>
           </p:txBody>
@@ -11567,10 +11073,10 @@
             <a:p>
               <a:pPr algn="ctr"/>
               <a:r>
-                <a:rPr lang="en-US" altLang="ja-JP" sz="700">
+                <a:rPr lang="en-US" altLang="ja-JP" sz="900">
                   <a:latin typeface="Consolas" panose="020B0609020204030204" pitchFamily="49" charset="0"/>
                 </a:rPr>
-                <a:t>MBindSettings.ahk</a:t>
+                <a:t>Core_Mods.ahk</a:t>
               </a:r>
             </a:p>
           </p:txBody>
@@ -11590,8 +11096,8 @@
         </p:nvSpPr>
         <p:spPr>
           <a:xfrm>
-            <a:off x="9070348" y="4760338"/>
-            <a:ext cx="1836066" cy="459114"/>
+            <a:off x="9366321" y="4618657"/>
+            <a:ext cx="1380112" cy="600795"/>
           </a:xfrm>
           <a:prstGeom prst="rect">
             <a:avLst/>
@@ -11632,7 +11138,29 @@
                 </a:solidFill>
                 <a:latin typeface="Consolas" panose="020B0609020204030204" pitchFamily="49" charset="0"/>
               </a:rPr>
-              <a:t>Library/*</a:t>
+              <a:t>src/Util_*.ahk</a:t>
+            </a:r>
+          </a:p>
+          <a:p>
+            <a:r>
+              <a:rPr lang="en-US" altLang="ja-JP" sz="1050">
+                <a:solidFill>
+                  <a:schemeClr val="bg1"/>
+                </a:solidFill>
+                <a:latin typeface="Consolas" panose="020B0609020204030204" pitchFamily="49" charset="0"/>
+              </a:rPr>
+              <a:t>env/env.yaml</a:t>
+            </a:r>
+          </a:p>
+          <a:p>
+            <a:r>
+              <a:rPr lang="en-US" altLang="ja-JP" sz="1050">
+                <a:solidFill>
+                  <a:schemeClr val="bg1"/>
+                </a:solidFill>
+                <a:latin typeface="Consolas" panose="020B0609020204030204" pitchFamily="49" charset="0"/>
+              </a:rPr>
+              <a:t>tools/*</a:t>
             </a:r>
           </a:p>
         </p:txBody>
@@ -11658,7 +11186,9 @@
             <a:avLst/>
           </a:prstGeom>
           <a:solidFill>
-            <a:schemeClr val="accent5"/>
+            <a:schemeClr val="bg2">
+              <a:lumMod val="50000"/>
+            </a:schemeClr>
           </a:solidFill>
           <a:ln w="12700">
             <a:solidFill>
@@ -11696,65 +11226,6 @@
             <a:endParaRPr lang="ja-JP" altLang="en-US" sz="1200">
               <a:latin typeface="Consolas" panose="020B0609020204030204" pitchFamily="49" charset="0"/>
             </a:endParaRPr>
-          </a:p>
-        </p:txBody>
-      </p:sp>
-      <p:sp>
-        <p:nvSpPr>
-          <p:cNvPr id="14" name="正方形/長方形 13">
-            <a:extLst>
-              <a:ext uri="{FF2B5EF4-FFF2-40B4-BE49-F238E27FC236}">
-                <a16:creationId xmlns:a16="http://schemas.microsoft.com/office/drawing/2014/main" id="{22597021-76BA-B59C-E4CE-977E04E90D43}"/>
-              </a:ext>
-            </a:extLst>
-          </p:cNvPr>
-          <p:cNvSpPr/>
-          <p:nvPr/>
-        </p:nvSpPr>
-        <p:spPr>
-          <a:xfrm>
-            <a:off x="9951623" y="4757782"/>
-            <a:ext cx="954790" cy="158880"/>
-          </a:xfrm>
-          <a:prstGeom prst="rect">
-            <a:avLst/>
-          </a:prstGeom>
-          <a:solidFill>
-            <a:schemeClr val="accent1"/>
-          </a:solidFill>
-          <a:ln w="12700">
-            <a:solidFill>
-              <a:schemeClr val="bg1"/>
-            </a:solidFill>
-          </a:ln>
-        </p:spPr>
-        <p:style>
-          <a:lnRef idx="2">
-            <a:schemeClr val="accent1">
-              <a:shade val="50000"/>
-            </a:schemeClr>
-          </a:lnRef>
-          <a:fillRef idx="1">
-            <a:schemeClr val="accent1"/>
-          </a:fillRef>
-          <a:effectRef idx="0">
-            <a:schemeClr val="accent1"/>
-          </a:effectRef>
-          <a:fontRef idx="minor">
-            <a:schemeClr val="lt1"/>
-          </a:fontRef>
-        </p:style>
-        <p:txBody>
-          <a:bodyPr rtlCol="0" anchor="ctr"/>
-          <a:lstStyle/>
-          <a:p>
-            <a:pPr algn="ctr"/>
-            <a:r>
-              <a:rPr lang="en-US" altLang="ja-JP" sz="1000">
-                <a:latin typeface="Consolas" panose="020B0609020204030204" pitchFamily="49" charset="0"/>
-              </a:rPr>
-              <a:t>Env/*</a:t>
-            </a:r>
           </a:p>
         </p:txBody>
       </p:sp>
@@ -11836,7 +11307,7 @@
                 </a:solidFill>
                 <a:latin typeface="Consolas" panose="020B0609020204030204" pitchFamily="49" charset="0"/>
               </a:rPr>
-              <a:t>IWA_General.ahk</a:t>
+              <a:t>IWA_Any.ahk</a:t>
             </a:r>
           </a:p>
         </p:txBody>
@@ -12488,7 +11959,7 @@
         <p:grpSpPr>
           <a:xfrm>
             <a:off x="9704934" y="4403296"/>
-            <a:ext cx="736420" cy="359426"/>
+            <a:ext cx="736420" cy="215359"/>
             <a:chOff x="6953268" y="4810112"/>
             <a:chExt cx="736420" cy="308209"/>
           </a:xfrm>
@@ -12582,65 +12053,6 @@
           </p:style>
         </p:cxnSp>
       </p:grpSp>
-      <p:sp>
-        <p:nvSpPr>
-          <p:cNvPr id="38" name="正方形/長方形 37">
-            <a:extLst>
-              <a:ext uri="{FF2B5EF4-FFF2-40B4-BE49-F238E27FC236}">
-                <a16:creationId xmlns:a16="http://schemas.microsoft.com/office/drawing/2014/main" id="{502CBD2E-7744-464E-ADD6-C38FB495F792}"/>
-              </a:ext>
-            </a:extLst>
-          </p:cNvPr>
-          <p:cNvSpPr/>
-          <p:nvPr/>
-        </p:nvSpPr>
-        <p:spPr>
-          <a:xfrm>
-            <a:off x="9951623" y="5060574"/>
-            <a:ext cx="954790" cy="158880"/>
-          </a:xfrm>
-          <a:prstGeom prst="rect">
-            <a:avLst/>
-          </a:prstGeom>
-          <a:solidFill>
-            <a:schemeClr val="accent1"/>
-          </a:solidFill>
-          <a:ln w="12700">
-            <a:solidFill>
-              <a:schemeClr val="bg1"/>
-            </a:solidFill>
-          </a:ln>
-        </p:spPr>
-        <p:style>
-          <a:lnRef idx="2">
-            <a:schemeClr val="accent1">
-              <a:shade val="50000"/>
-            </a:schemeClr>
-          </a:lnRef>
-          <a:fillRef idx="1">
-            <a:schemeClr val="accent1"/>
-          </a:fillRef>
-          <a:effectRef idx="0">
-            <a:schemeClr val="accent1"/>
-          </a:effectRef>
-          <a:fontRef idx="minor">
-            <a:schemeClr val="lt1"/>
-          </a:fontRef>
-        </p:style>
-        <p:txBody>
-          <a:bodyPr rtlCol="0" anchor="ctr"/>
-          <a:lstStyle/>
-          <a:p>
-            <a:pPr algn="ctr"/>
-            <a:r>
-              <a:rPr lang="en-US" altLang="ja-JP" sz="1000">
-                <a:latin typeface="Consolas" panose="020B0609020204030204" pitchFamily="49" charset="0"/>
-              </a:rPr>
-              <a:t>Tools/*</a:t>
-            </a:r>
-          </a:p>
-        </p:txBody>
-      </p:sp>
       <p:cxnSp>
         <p:nvCxnSpPr>
           <p:cNvPr id="39" name="直線矢印コネクタ 38">
@@ -21762,7 +21174,7 @@
                   <a:ea typeface="Cascadia Code" panose="020B0609020000020004" pitchFamily="49" charset="0"/>
                   <a:cs typeface="Cascadia Code" panose="020B0609020000020004" pitchFamily="49" charset="0"/>
                 </a:rPr>
-                <a:t>Trello</a:t>
+                <a:t>Supa</a:t>
               </a:r>
             </a:p>
             <a:p>
@@ -23875,7 +23287,7 @@
                   <a:ea typeface="Cascadia Code" panose="020B0609020000020004" pitchFamily="49" charset="0"/>
                   <a:cs typeface="Cascadia Code" panose="020B0609020000020004" pitchFamily="49" charset="0"/>
                 </a:rPr>
-                <a:t>Trello</a:t>
+                <a:t>Supa</a:t>
               </a:r>
             </a:p>
             <a:p>
@@ -24463,7 +23875,7 @@
         <p:spPr>
           <a:xfrm>
             <a:off x="909566" y="967563"/>
-            <a:ext cx="6420347" cy="1569660"/>
+            <a:ext cx="7000634" cy="1569660"/>
           </a:xfrm>
           <a:prstGeom prst="rect">
             <a:avLst/>
@@ -24550,6 +23962,17 @@
               <a:buChar char="•"/>
             </a:pPr>
             <a:r>
+              <a:rPr lang="en-US" altLang="ja-JP" sz="2400">
+                <a:solidFill>
+                  <a:schemeClr val="bg1"/>
+                </a:solidFill>
+                <a:latin typeface="Yu Gothic UI" panose="020B0500000000000000" pitchFamily="50" charset="-128"/>
+                <a:ea typeface="Yu Gothic UI" panose="020B0500000000000000" pitchFamily="50" charset="-128"/>
+                <a:cs typeface="Cascadia Code" panose="020B0609020000020004" pitchFamily="49" charset="0"/>
+              </a:rPr>
+              <a:t>Supabase</a:t>
+            </a:r>
+            <a:r>
               <a:rPr kumimoji="1" lang="en-US" altLang="ja-JP" sz="2400">
                 <a:solidFill>
                   <a:schemeClr val="bg1"/>
@@ -24558,7 +23981,7 @@
                 <a:ea typeface="Yu Gothic UI" panose="020B0500000000000000" pitchFamily="50" charset="-128"/>
                 <a:cs typeface="Cascadia Code" panose="020B0609020000020004" pitchFamily="49" charset="0"/>
               </a:rPr>
-              <a:t>TrelloAPI</a:t>
+              <a:t>API</a:t>
             </a:r>
             <a:r>
               <a:rPr kumimoji="1" lang="ja-JP" altLang="en-US" sz="2400">
@@ -31762,9 +31185,7 @@
           <a:prstGeom prst="roundRect">
             <a:avLst/>
           </a:prstGeom>
-          <a:solidFill>
-            <a:schemeClr val="bg1"/>
-          </a:solidFill>
+          <a:noFill/>
           <a:ln w="12700">
             <a:solidFill>
               <a:schemeClr val="bg1"/>
@@ -34573,7 +33994,7 @@
         </p:blipFill>
         <p:spPr bwMode="auto">
           <a:xfrm>
-            <a:off x="4108356" y="3768121"/>
+            <a:off x="2957209" y="4444755"/>
             <a:ext cx="498652" cy="483203"/>
           </a:xfrm>
           <a:prstGeom prst="rect">
@@ -34911,53 +34332,6 @@
       </p:pic>
       <p:pic>
         <p:nvPicPr>
-          <p:cNvPr id="124" name="Picture 2">
-            <a:extLst>
-              <a:ext uri="{FF2B5EF4-FFF2-40B4-BE49-F238E27FC236}">
-                <a16:creationId xmlns:a16="http://schemas.microsoft.com/office/drawing/2014/main" id="{ED3959FF-00DB-F9CF-C5A9-76122FDDBABC}"/>
-              </a:ext>
-            </a:extLst>
-          </p:cNvPr>
-          <p:cNvPicPr>
-            <a:picLocks noChangeAspect="1" noChangeArrowheads="1"/>
-          </p:cNvPicPr>
-          <p:nvPr/>
-        </p:nvPicPr>
-        <p:blipFill>
-          <a:blip r:embed="rId11" cstate="print">
-            <a:extLst>
-              <a:ext uri="{28A0092B-C50C-407E-A947-70E740481C1C}">
-                <a14:useLocalDpi xmlns:a14="http://schemas.microsoft.com/office/drawing/2010/main" val="0"/>
-              </a:ext>
-            </a:extLst>
-          </a:blip>
-          <a:srcRect/>
-          <a:stretch>
-            <a:fillRect/>
-          </a:stretch>
-        </p:blipFill>
-        <p:spPr bwMode="auto">
-          <a:xfrm>
-            <a:off x="2968247" y="4442096"/>
-            <a:ext cx="485504" cy="485504"/>
-          </a:xfrm>
-          <a:prstGeom prst="rect">
-            <a:avLst/>
-          </a:prstGeom>
-          <a:noFill/>
-          <a:extLst>
-            <a:ext uri="{909E8E84-426E-40DD-AFC4-6F175D3DCCD1}">
-              <a14:hiddenFill xmlns:a14="http://schemas.microsoft.com/office/drawing/2010/main">
-                <a:solidFill>
-                  <a:srgbClr val="FFFFFF"/>
-                </a:solidFill>
-              </a14:hiddenFill>
-            </a:ext>
-          </a:extLst>
-        </p:spPr>
-      </p:pic>
-      <p:pic>
-        <p:nvPicPr>
           <p:cNvPr id="80" name="図 79">
             <a:extLst>
               <a:ext uri="{FF2B5EF4-FFF2-40B4-BE49-F238E27FC236}">
@@ -34971,7 +34345,7 @@
           <p:nvPr/>
         </p:nvPicPr>
         <p:blipFill>
-          <a:blip r:embed="rId12"/>
+          <a:blip r:embed="rId11"/>
           <a:stretch>
             <a:fillRect/>
           </a:stretch>
@@ -35001,7 +34375,7 @@
           <p:nvPr/>
         </p:nvPicPr>
         <p:blipFill>
-          <a:blip r:embed="rId13"/>
+          <a:blip r:embed="rId12"/>
           <a:stretch>
             <a:fillRect/>
           </a:stretch>
@@ -35031,7 +34405,7 @@
           <p:nvPr/>
         </p:nvPicPr>
         <p:blipFill>
-          <a:blip r:embed="rId14" cstate="print">
+          <a:blip r:embed="rId13" cstate="print">
             <a:extLst>
               <a:ext uri="{28A0092B-C50C-407E-A947-70E740481C1C}">
                 <a14:useLocalDpi xmlns:a14="http://schemas.microsoft.com/office/drawing/2010/main" val="0"/>
@@ -35078,7 +34452,7 @@
           <p:nvPr/>
         </p:nvPicPr>
         <p:blipFill>
-          <a:blip r:embed="rId15">
+          <a:blip r:embed="rId14">
             <a:extLst>
               <a:ext uri="{28A0092B-C50C-407E-A947-70E740481C1C}">
                 <a14:useLocalDpi xmlns:a14="http://schemas.microsoft.com/office/drawing/2010/main" val="0"/>
@@ -35241,7 +34615,7 @@
           <p:nvPr/>
         </p:nvPicPr>
         <p:blipFill>
-          <a:blip r:embed="rId16">
+          <a:blip r:embed="rId15">
             <a:extLst>
               <a:ext uri="{28A0092B-C50C-407E-A947-70E740481C1C}">
                 <a14:useLocalDpi xmlns:a14="http://schemas.microsoft.com/office/drawing/2010/main" val="0"/>
@@ -35288,7 +34662,7 @@
           <p:nvPr/>
         </p:nvPicPr>
         <p:blipFill>
-          <a:blip r:embed="rId17"/>
+          <a:blip r:embed="rId16"/>
           <a:stretch>
             <a:fillRect/>
           </a:stretch>
